--- a/PPT Final Project Home Credit Scoring_Raihan Azhar Rafi.pptx
+++ b/PPT Final Project Home Credit Scoring_Raihan Azhar Rafi.pptx
@@ -10,7 +10,10 @@
     <p:sldId id="259" r:id="rId4"/>
     <p:sldId id="260" r:id="rId5"/>
     <p:sldId id="261" r:id="rId6"/>
-    <p:sldId id="262" r:id="rId7"/>
+    <p:sldId id="263" r:id="rId7"/>
+    <p:sldId id="264" r:id="rId8"/>
+    <p:sldId id="265" r:id="rId9"/>
+    <p:sldId id="262" r:id="rId10"/>
   </p:sldIdLst>
   <p:sldSz cx="12192000" cy="6858000"/>
   <p:notesSz cx="6858000" cy="9144000"/>
@@ -109,6 +112,11 @@
       </a:defRPr>
     </a:lvl9pPr>
   </p:defaultTextStyle>
+  <p:extLst>
+    <p:ext uri="{EFAFB233-063F-42B5-8137-9DF3F51BA10A}">
+      <p15:sldGuideLst xmlns:p15="http://schemas.microsoft.com/office/powerpoint/2012/main"/>
+    </p:ext>
+  </p:extLst>
 </p:presentation>
 </file>
 
@@ -261,7 +269,7 @@
           <a:p>
             <a:fld id="{A9922CD5-F108-420B-8257-F807358BA041}" type="datetimeFigureOut">
               <a:rPr lang="en-ID" smtClean="0"/>
-              <a:t>04/05/2026</a:t>
+              <a:t>07/05/2026</a:t>
             </a:fld>
             <a:endParaRPr lang="en-ID"/>
           </a:p>
@@ -461,7 +469,7 @@
           <a:p>
             <a:fld id="{A9922CD5-F108-420B-8257-F807358BA041}" type="datetimeFigureOut">
               <a:rPr lang="en-ID" smtClean="0"/>
-              <a:t>04/05/2026</a:t>
+              <a:t>07/05/2026</a:t>
             </a:fld>
             <a:endParaRPr lang="en-ID"/>
           </a:p>
@@ -671,7 +679,7 @@
           <a:p>
             <a:fld id="{A9922CD5-F108-420B-8257-F807358BA041}" type="datetimeFigureOut">
               <a:rPr lang="en-ID" smtClean="0"/>
-              <a:t>04/05/2026</a:t>
+              <a:t>07/05/2026</a:t>
             </a:fld>
             <a:endParaRPr lang="en-ID"/>
           </a:p>
@@ -1383,7 +1391,7 @@
           <a:p>
             <a:fld id="{1D8BD707-D9CF-40AE-B4C6-C98DA3205C09}" type="datetimeFigureOut">
               <a:rPr lang="en-US"/>
-              <a:t>5/4/2026</a:t>
+              <a:t>5/7/2026</a:t>
             </a:fld>
             <a:endParaRPr lang="en-US"/>
           </a:p>
@@ -1561,7 +1569,7 @@
           <a:p>
             <a:fld id="{A9922CD5-F108-420B-8257-F807358BA041}" type="datetimeFigureOut">
               <a:rPr lang="en-ID" smtClean="0"/>
-              <a:t>04/05/2026</a:t>
+              <a:t>07/05/2026</a:t>
             </a:fld>
             <a:endParaRPr lang="en-ID"/>
           </a:p>
@@ -1837,7 +1845,7 @@
           <a:p>
             <a:fld id="{A9922CD5-F108-420B-8257-F807358BA041}" type="datetimeFigureOut">
               <a:rPr lang="en-ID" smtClean="0"/>
-              <a:t>04/05/2026</a:t>
+              <a:t>07/05/2026</a:t>
             </a:fld>
             <a:endParaRPr lang="en-ID"/>
           </a:p>
@@ -2105,7 +2113,7 @@
           <a:p>
             <a:fld id="{A9922CD5-F108-420B-8257-F807358BA041}" type="datetimeFigureOut">
               <a:rPr lang="en-ID" smtClean="0"/>
-              <a:t>04/05/2026</a:t>
+              <a:t>07/05/2026</a:t>
             </a:fld>
             <a:endParaRPr lang="en-ID"/>
           </a:p>
@@ -2520,7 +2528,7 @@
           <a:p>
             <a:fld id="{A9922CD5-F108-420B-8257-F807358BA041}" type="datetimeFigureOut">
               <a:rPr lang="en-ID" smtClean="0"/>
-              <a:t>04/05/2026</a:t>
+              <a:t>07/05/2026</a:t>
             </a:fld>
             <a:endParaRPr lang="en-ID"/>
           </a:p>
@@ -2662,7 +2670,7 @@
           <a:p>
             <a:fld id="{A9922CD5-F108-420B-8257-F807358BA041}" type="datetimeFigureOut">
               <a:rPr lang="en-ID" smtClean="0"/>
-              <a:t>04/05/2026</a:t>
+              <a:t>07/05/2026</a:t>
             </a:fld>
             <a:endParaRPr lang="en-ID"/>
           </a:p>
@@ -2775,7 +2783,7 @@
           <a:p>
             <a:fld id="{A9922CD5-F108-420B-8257-F807358BA041}" type="datetimeFigureOut">
               <a:rPr lang="en-ID" smtClean="0"/>
-              <a:t>04/05/2026</a:t>
+              <a:t>07/05/2026</a:t>
             </a:fld>
             <a:endParaRPr lang="en-ID"/>
           </a:p>
@@ -3088,7 +3096,7 @@
           <a:p>
             <a:fld id="{A9922CD5-F108-420B-8257-F807358BA041}" type="datetimeFigureOut">
               <a:rPr lang="en-ID" smtClean="0"/>
-              <a:t>04/05/2026</a:t>
+              <a:t>07/05/2026</a:t>
             </a:fld>
             <a:endParaRPr lang="en-ID"/>
           </a:p>
@@ -3377,7 +3385,7 @@
           <a:p>
             <a:fld id="{A9922CD5-F108-420B-8257-F807358BA041}" type="datetimeFigureOut">
               <a:rPr lang="en-ID" smtClean="0"/>
-              <a:t>04/05/2026</a:t>
+              <a:t>07/05/2026</a:t>
             </a:fld>
             <a:endParaRPr lang="en-ID"/>
           </a:p>
@@ -3620,7 +3628,7 @@
           <a:p>
             <a:fld id="{A9922CD5-F108-420B-8257-F807358BA041}" type="datetimeFigureOut">
               <a:rPr lang="en-ID" smtClean="0"/>
-              <a:t>04/05/2026</a:t>
+              <a:t>07/05/2026</a:t>
             </a:fld>
             <a:endParaRPr lang="en-ID"/>
           </a:p>
@@ -5911,7 +5919,7 @@
         </p:nvSpPr>
         <p:spPr>
           <a:xfrm>
-            <a:off x="534759" y="1156079"/>
+            <a:off x="534759" y="1657595"/>
             <a:ext cx="5683161" cy="984885"/>
           </a:xfrm>
           <a:prstGeom prst="rect">
@@ -9888,6 +9896,4578 @@
 </file>
 
 <file path=ppt/slides/slide6.xml><?xml version="1.0" encoding="utf-8"?>
+<p:sld xmlns:a="http://schemas.openxmlformats.org/drawingml/2006/main" xmlns:r="http://schemas.openxmlformats.org/officeDocument/2006/relationships" xmlns:p="http://schemas.openxmlformats.org/presentationml/2006/main">
+  <p:cSld>
+    <p:spTree>
+      <p:nvGrpSpPr>
+        <p:cNvPr id="1" name="">
+          <a:extLst>
+            <a:ext uri="{FF2B5EF4-FFF2-40B4-BE49-F238E27FC236}">
+              <a16:creationId xmlns:a16="http://schemas.microsoft.com/office/drawing/2014/main" id="{2AD7815B-DB23-B804-2AF4-FD1C8A08B501}"/>
+            </a:ext>
+          </a:extLst>
+        </p:cNvPr>
+        <p:cNvGrpSpPr/>
+        <p:nvPr/>
+      </p:nvGrpSpPr>
+      <p:grpSpPr>
+        <a:xfrm>
+          <a:off x="0" y="0"/>
+          <a:ext cx="0" cy="0"/>
+          <a:chOff x="0" y="0"/>
+          <a:chExt cx="0" cy="0"/>
+        </a:xfrm>
+      </p:grpSpPr>
+      <p:pic>
+        <p:nvPicPr>
+          <p:cNvPr id="4" name="object 4">
+            <a:extLst>
+              <a:ext uri="{FF2B5EF4-FFF2-40B4-BE49-F238E27FC236}">
+                <a16:creationId xmlns:a16="http://schemas.microsoft.com/office/drawing/2014/main" id="{AF67A25B-81DC-34E3-CD59-E42A34F08D14}"/>
+              </a:ext>
+            </a:extLst>
+          </p:cNvPr>
+          <p:cNvPicPr/>
+          <p:nvPr/>
+        </p:nvPicPr>
+        <p:blipFill>
+          <a:blip r:embed="rId2" cstate="print"/>
+          <a:stretch>
+            <a:fillRect/>
+          </a:stretch>
+        </p:blipFill>
+        <p:spPr>
+          <a:xfrm>
+            <a:off x="10714044" y="466932"/>
+            <a:ext cx="943197" cy="707397"/>
+          </a:xfrm>
+          <a:prstGeom prst="rect">
+            <a:avLst/>
+          </a:prstGeom>
+        </p:spPr>
+      </p:pic>
+      <p:sp>
+        <p:nvSpPr>
+          <p:cNvPr id="6" name="TextBox 13">
+            <a:extLst>
+              <a:ext uri="{FF2B5EF4-FFF2-40B4-BE49-F238E27FC236}">
+                <a16:creationId xmlns:a16="http://schemas.microsoft.com/office/drawing/2014/main" id="{1AA8D55E-D429-695A-9EE4-90BB15F37C1A}"/>
+              </a:ext>
+            </a:extLst>
+          </p:cNvPr>
+          <p:cNvSpPr txBox="1"/>
+          <p:nvPr/>
+        </p:nvSpPr>
+        <p:spPr>
+          <a:xfrm>
+            <a:off x="534759" y="1156079"/>
+            <a:ext cx="5683161" cy="984885"/>
+          </a:xfrm>
+          <a:prstGeom prst="rect">
+            <a:avLst/>
+          </a:prstGeom>
+        </p:spPr>
+        <p:txBody>
+          <a:bodyPr wrap="square" lIns="0" tIns="0" rIns="0" bIns="0" rtlCol="0" anchor="t">
+            <a:spAutoFit/>
+          </a:bodyPr>
+          <a:lstStyle/>
+          <a:p>
+            <a:pPr lvl="0"/>
+            <a:r>
+              <a:rPr lang="en-US" sz="3200" b="1" dirty="0">
+                <a:latin typeface="Noto Serif Bengali SemiCondensed Heavy"/>
+                <a:ea typeface="Noto Serif Bengali SemiCondensed Heavy"/>
+                <a:cs typeface="Noto Serif Bengali SemiCondensed Heavy"/>
+                <a:sym typeface="Noto Serif Bengali SemiCondensed Heavy"/>
+              </a:rPr>
+              <a:t>Hasil Analisis Risiko Gagal Bayar </a:t>
+            </a:r>
+            <a:r>
+              <a:rPr lang="en-US" sz="3200" b="1" dirty="0" err="1">
+                <a:latin typeface="Noto Serif Bengali SemiCondensed Heavy"/>
+                <a:ea typeface="Noto Serif Bengali SemiCondensed Heavy"/>
+                <a:cs typeface="Noto Serif Bengali SemiCondensed Heavy"/>
+                <a:sym typeface="Noto Serif Bengali SemiCondensed Heavy"/>
+              </a:rPr>
+              <a:t>berdasarkan</a:t>
+            </a:r>
+            <a:r>
+              <a:rPr lang="en-US" sz="3200" b="1" dirty="0">
+                <a:latin typeface="Noto Serif Bengali SemiCondensed Heavy"/>
+                <a:ea typeface="Noto Serif Bengali SemiCondensed Heavy"/>
+                <a:cs typeface="Noto Serif Bengali SemiCondensed Heavy"/>
+                <a:sym typeface="Noto Serif Bengali SemiCondensed Heavy"/>
+              </a:rPr>
+              <a:t> Tingkat Pendidikan</a:t>
+            </a:r>
+          </a:p>
+        </p:txBody>
+      </p:sp>
+      <p:sp>
+        <p:nvSpPr>
+          <p:cNvPr id="7" name="TextBox 14">
+            <a:extLst>
+              <a:ext uri="{FF2B5EF4-FFF2-40B4-BE49-F238E27FC236}">
+                <a16:creationId xmlns:a16="http://schemas.microsoft.com/office/drawing/2014/main" id="{2EBC4AEE-944B-19EF-3A13-D5562F5035DE}"/>
+              </a:ext>
+            </a:extLst>
+          </p:cNvPr>
+          <p:cNvSpPr txBox="1"/>
+          <p:nvPr/>
+        </p:nvSpPr>
+        <p:spPr>
+          <a:xfrm>
+            <a:off x="534759" y="2241021"/>
+            <a:ext cx="5683161" cy="1723549"/>
+          </a:xfrm>
+          <a:prstGeom prst="rect">
+            <a:avLst/>
+          </a:prstGeom>
+        </p:spPr>
+        <p:txBody>
+          <a:bodyPr wrap="square" lIns="0" tIns="0" rIns="0" bIns="0" rtlCol="0" anchor="t">
+            <a:spAutoFit/>
+          </a:bodyPr>
+          <a:lstStyle/>
+          <a:p>
+            <a:r>
+              <a:rPr lang="en-US" sz="1600" dirty="0" err="1">
+                <a:latin typeface="Asap"/>
+                <a:ea typeface="Asap"/>
+                <a:cs typeface="Asap"/>
+                <a:sym typeface="Asap"/>
+              </a:rPr>
+              <a:t>Berdasarkan</a:t>
+            </a:r>
+            <a:r>
+              <a:rPr lang="en-US" sz="1600" dirty="0">
+                <a:latin typeface="Asap"/>
+                <a:ea typeface="Asap"/>
+                <a:cs typeface="Asap"/>
+                <a:sym typeface="Asap"/>
+              </a:rPr>
+              <a:t> </a:t>
+            </a:r>
+            <a:r>
+              <a:rPr lang="en-US" sz="1600" dirty="0" err="1">
+                <a:latin typeface="Asap"/>
+                <a:ea typeface="Asap"/>
+                <a:cs typeface="Asap"/>
+                <a:sym typeface="Asap"/>
+              </a:rPr>
+              <a:t>hasil</a:t>
+            </a:r>
+            <a:r>
+              <a:rPr lang="en-US" sz="1600" dirty="0">
+                <a:latin typeface="Asap"/>
+                <a:ea typeface="Asap"/>
+                <a:cs typeface="Asap"/>
+                <a:sym typeface="Asap"/>
+              </a:rPr>
+              <a:t> </a:t>
+            </a:r>
+            <a:r>
+              <a:rPr lang="en-US" sz="1600" dirty="0" err="1">
+                <a:latin typeface="Asap"/>
+                <a:ea typeface="Asap"/>
+                <a:cs typeface="Asap"/>
+                <a:sym typeface="Asap"/>
+              </a:rPr>
+              <a:t>analisis</a:t>
+            </a:r>
+            <a:r>
+              <a:rPr lang="en-US" sz="1600" dirty="0">
+                <a:latin typeface="Asap"/>
+                <a:ea typeface="Asap"/>
+                <a:cs typeface="Asap"/>
+                <a:sym typeface="Asap"/>
+              </a:rPr>
+              <a:t> </a:t>
+            </a:r>
+            <a:r>
+              <a:rPr lang="en-US" sz="1600" dirty="0" err="1">
+                <a:latin typeface="Asap"/>
+                <a:ea typeface="Asap"/>
+                <a:cs typeface="Asap"/>
+                <a:sym typeface="Asap"/>
+              </a:rPr>
+              <a:t>risiko</a:t>
+            </a:r>
+            <a:r>
+              <a:rPr lang="en-US" sz="1600" dirty="0">
+                <a:latin typeface="Asap"/>
+                <a:ea typeface="Asap"/>
+                <a:cs typeface="Asap"/>
+                <a:sym typeface="Asap"/>
+              </a:rPr>
+              <a:t> </a:t>
+            </a:r>
+            <a:r>
+              <a:rPr lang="en-US" sz="1600" dirty="0" err="1">
+                <a:latin typeface="Asap"/>
+                <a:ea typeface="Asap"/>
+                <a:cs typeface="Asap"/>
+                <a:sym typeface="Asap"/>
+              </a:rPr>
+              <a:t>gagal</a:t>
+            </a:r>
+            <a:r>
+              <a:rPr lang="en-US" sz="1600" dirty="0">
+                <a:latin typeface="Asap"/>
+                <a:ea typeface="Asap"/>
+                <a:cs typeface="Asap"/>
+                <a:sym typeface="Asap"/>
+              </a:rPr>
+              <a:t> </a:t>
+            </a:r>
+            <a:r>
+              <a:rPr lang="en-US" sz="1600" dirty="0" err="1">
+                <a:latin typeface="Asap"/>
+                <a:ea typeface="Asap"/>
+                <a:cs typeface="Asap"/>
+                <a:sym typeface="Asap"/>
+              </a:rPr>
+              <a:t>bayar</a:t>
+            </a:r>
+            <a:r>
+              <a:rPr lang="en-US" sz="1600" dirty="0">
+                <a:latin typeface="Asap"/>
+                <a:ea typeface="Asap"/>
+                <a:cs typeface="Asap"/>
+                <a:sym typeface="Asap"/>
+              </a:rPr>
+              <a:t> </a:t>
+            </a:r>
+            <a:r>
+              <a:rPr lang="en-US" sz="1600" dirty="0" err="1">
+                <a:latin typeface="Asap"/>
+                <a:ea typeface="Asap"/>
+                <a:cs typeface="Asap"/>
+                <a:sym typeface="Asap"/>
+              </a:rPr>
+              <a:t>berdasarkan</a:t>
+            </a:r>
+            <a:r>
+              <a:rPr lang="en-US" sz="1600" dirty="0">
+                <a:latin typeface="Asap"/>
+                <a:ea typeface="Asap"/>
+                <a:cs typeface="Asap"/>
+                <a:sym typeface="Asap"/>
+              </a:rPr>
+              <a:t> </a:t>
+            </a:r>
+            <a:r>
+              <a:rPr lang="en-US" sz="1600" dirty="0" err="1">
+                <a:latin typeface="Asap"/>
+                <a:ea typeface="Asap"/>
+                <a:cs typeface="Asap"/>
+                <a:sym typeface="Asap"/>
+              </a:rPr>
+              <a:t>tingkat</a:t>
+            </a:r>
+            <a:r>
+              <a:rPr lang="en-US" sz="1600" dirty="0">
+                <a:latin typeface="Asap"/>
+                <a:ea typeface="Asap"/>
+                <a:cs typeface="Asap"/>
+                <a:sym typeface="Asap"/>
+              </a:rPr>
+              <a:t> </a:t>
+            </a:r>
+            <a:r>
+              <a:rPr lang="en-US" sz="1600" dirty="0" err="1">
+                <a:latin typeface="Asap"/>
+                <a:ea typeface="Asap"/>
+                <a:cs typeface="Asap"/>
+                <a:sym typeface="Asap"/>
+              </a:rPr>
+              <a:t>pendidikan</a:t>
+            </a:r>
+            <a:r>
+              <a:rPr lang="en-US" sz="1600" dirty="0">
+                <a:latin typeface="Asap"/>
+                <a:ea typeface="Asap"/>
+                <a:cs typeface="Asap"/>
+                <a:sym typeface="Asap"/>
+              </a:rPr>
+              <a:t>, </a:t>
+            </a:r>
+            <a:r>
+              <a:rPr lang="en-US" sz="1600" dirty="0" err="1">
+                <a:latin typeface="Asap"/>
+                <a:ea typeface="Asap"/>
+                <a:cs typeface="Asap"/>
+                <a:sym typeface="Asap"/>
+              </a:rPr>
+              <a:t>nasabah</a:t>
+            </a:r>
+            <a:r>
+              <a:rPr lang="en-US" sz="1600" dirty="0">
+                <a:latin typeface="Asap"/>
+                <a:ea typeface="Asap"/>
+                <a:cs typeface="Asap"/>
+                <a:sym typeface="Asap"/>
+              </a:rPr>
+              <a:t> </a:t>
+            </a:r>
+            <a:r>
+              <a:rPr lang="en-US" sz="1600" dirty="0" err="1">
+                <a:latin typeface="Asap"/>
+                <a:ea typeface="Asap"/>
+                <a:cs typeface="Asap"/>
+                <a:sym typeface="Asap"/>
+              </a:rPr>
+              <a:t>dengan</a:t>
+            </a:r>
+            <a:r>
+              <a:rPr lang="en-US" sz="1600" dirty="0">
+                <a:latin typeface="Asap"/>
+                <a:ea typeface="Asap"/>
+                <a:cs typeface="Asap"/>
+                <a:sym typeface="Asap"/>
+              </a:rPr>
+              <a:t> </a:t>
+            </a:r>
+            <a:r>
+              <a:rPr lang="en-US" sz="1600" dirty="0" err="1">
+                <a:latin typeface="Asap"/>
+                <a:ea typeface="Asap"/>
+                <a:cs typeface="Asap"/>
+                <a:sym typeface="Asap"/>
+              </a:rPr>
+              <a:t>tingkat</a:t>
+            </a:r>
+            <a:r>
+              <a:rPr lang="en-US" sz="1600" dirty="0">
+                <a:latin typeface="Asap"/>
+                <a:ea typeface="Asap"/>
+                <a:cs typeface="Asap"/>
+                <a:sym typeface="Asap"/>
+              </a:rPr>
+              <a:t> </a:t>
+            </a:r>
+            <a:r>
+              <a:rPr lang="en-US" sz="1600" dirty="0" err="1">
+                <a:latin typeface="Asap"/>
+                <a:ea typeface="Asap"/>
+                <a:cs typeface="Asap"/>
+                <a:sym typeface="Asap"/>
+              </a:rPr>
+              <a:t>pendidikan</a:t>
+            </a:r>
+            <a:r>
+              <a:rPr lang="en-US" sz="1600" dirty="0">
+                <a:latin typeface="Asap"/>
+                <a:ea typeface="Asap"/>
+                <a:cs typeface="Asap"/>
+                <a:sym typeface="Asap"/>
+              </a:rPr>
+              <a:t> lower secondary </a:t>
+            </a:r>
+            <a:r>
+              <a:rPr lang="en-US" sz="1600" dirty="0" err="1">
+                <a:latin typeface="Asap"/>
+                <a:ea typeface="Asap"/>
+                <a:cs typeface="Asap"/>
+                <a:sym typeface="Asap"/>
+              </a:rPr>
+              <a:t>memiliki</a:t>
+            </a:r>
+            <a:r>
+              <a:rPr lang="en-US" sz="1600" dirty="0">
+                <a:latin typeface="Asap"/>
+                <a:ea typeface="Asap"/>
+                <a:cs typeface="Asap"/>
+                <a:sym typeface="Asap"/>
+              </a:rPr>
+              <a:t> </a:t>
+            </a:r>
+            <a:r>
+              <a:rPr lang="en-US" sz="1600" dirty="0" err="1">
+                <a:latin typeface="Asap"/>
+                <a:ea typeface="Asap"/>
+                <a:cs typeface="Asap"/>
+                <a:sym typeface="Asap"/>
+              </a:rPr>
+              <a:t>risiko</a:t>
+            </a:r>
+            <a:r>
+              <a:rPr lang="en-US" sz="1600" dirty="0">
+                <a:latin typeface="Asap"/>
+                <a:ea typeface="Asap"/>
+                <a:cs typeface="Asap"/>
+                <a:sym typeface="Asap"/>
+              </a:rPr>
+              <a:t> </a:t>
+            </a:r>
+            <a:r>
+              <a:rPr lang="en-US" sz="1600" dirty="0" err="1">
+                <a:latin typeface="Asap"/>
+                <a:ea typeface="Asap"/>
+                <a:cs typeface="Asap"/>
+                <a:sym typeface="Asap"/>
+              </a:rPr>
+              <a:t>gagal</a:t>
+            </a:r>
+            <a:r>
+              <a:rPr lang="en-US" sz="1600" dirty="0">
+                <a:latin typeface="Asap"/>
+                <a:ea typeface="Asap"/>
+                <a:cs typeface="Asap"/>
+                <a:sym typeface="Asap"/>
+              </a:rPr>
+              <a:t> </a:t>
+            </a:r>
+            <a:r>
+              <a:rPr lang="en-US" sz="1600" dirty="0" err="1">
+                <a:latin typeface="Asap"/>
+                <a:ea typeface="Asap"/>
+                <a:cs typeface="Asap"/>
+                <a:sym typeface="Asap"/>
+              </a:rPr>
+              <a:t>bayar</a:t>
+            </a:r>
+            <a:r>
+              <a:rPr lang="en-US" sz="1600" dirty="0">
+                <a:latin typeface="Asap"/>
+                <a:ea typeface="Asap"/>
+                <a:cs typeface="Asap"/>
+                <a:sym typeface="Asap"/>
+              </a:rPr>
+              <a:t> </a:t>
+            </a:r>
+            <a:r>
+              <a:rPr lang="en-US" sz="1600" dirty="0" err="1">
+                <a:latin typeface="Asap"/>
+                <a:ea typeface="Asap"/>
+                <a:cs typeface="Asap"/>
+                <a:sym typeface="Asap"/>
+              </a:rPr>
+              <a:t>tertinggi</a:t>
+            </a:r>
+            <a:r>
+              <a:rPr lang="en-US" sz="1600" dirty="0">
+                <a:latin typeface="Asap"/>
+                <a:ea typeface="Asap"/>
+                <a:cs typeface="Asap"/>
+                <a:sym typeface="Asap"/>
+              </a:rPr>
+              <a:t> </a:t>
+            </a:r>
+            <a:r>
+              <a:rPr lang="en-US" sz="1600" dirty="0" err="1">
+                <a:latin typeface="Asap"/>
+                <a:ea typeface="Asap"/>
+                <a:cs typeface="Asap"/>
+                <a:sym typeface="Asap"/>
+              </a:rPr>
+              <a:t>kurang</a:t>
+            </a:r>
+            <a:r>
+              <a:rPr lang="en-US" sz="1600" dirty="0">
+                <a:latin typeface="Asap"/>
+                <a:ea typeface="Asap"/>
+                <a:cs typeface="Asap"/>
+                <a:sym typeface="Asap"/>
+              </a:rPr>
+              <a:t> </a:t>
+            </a:r>
+            <a:r>
+              <a:rPr lang="en-US" sz="1600" dirty="0" err="1">
+                <a:latin typeface="Asap"/>
+                <a:ea typeface="Asap"/>
+                <a:cs typeface="Asap"/>
+                <a:sym typeface="Asap"/>
+              </a:rPr>
+              <a:t>lebih</a:t>
+            </a:r>
+            <a:r>
+              <a:rPr lang="en-US" sz="1600" dirty="0">
+                <a:latin typeface="Asap"/>
+                <a:ea typeface="Asap"/>
+                <a:cs typeface="Asap"/>
+                <a:sym typeface="Asap"/>
+              </a:rPr>
+              <a:t> (0.11) </a:t>
+            </a:r>
+            <a:r>
+              <a:rPr lang="en-US" sz="1600" dirty="0" err="1">
+                <a:latin typeface="Asap"/>
+                <a:ea typeface="Asap"/>
+                <a:cs typeface="Asap"/>
+                <a:sym typeface="Asap"/>
+              </a:rPr>
+              <a:t>atau</a:t>
+            </a:r>
+            <a:r>
+              <a:rPr lang="en-US" sz="1600" dirty="0">
+                <a:latin typeface="Asap"/>
+                <a:ea typeface="Asap"/>
+                <a:cs typeface="Asap"/>
+                <a:sym typeface="Asap"/>
+              </a:rPr>
+              <a:t> 11%. Hal </a:t>
+            </a:r>
+            <a:r>
+              <a:rPr lang="en-US" sz="1600" dirty="0" err="1">
+                <a:latin typeface="Asap"/>
+                <a:ea typeface="Asap"/>
+                <a:cs typeface="Asap"/>
+                <a:sym typeface="Asap"/>
+              </a:rPr>
+              <a:t>tersebut</a:t>
+            </a:r>
+            <a:r>
+              <a:rPr lang="en-US" sz="1600" dirty="0">
+                <a:latin typeface="Asap"/>
+                <a:ea typeface="Asap"/>
+                <a:cs typeface="Asap"/>
+                <a:sym typeface="Asap"/>
+              </a:rPr>
+              <a:t> </a:t>
+            </a:r>
+            <a:r>
+              <a:rPr lang="en-US" sz="1600" dirty="0" err="1">
+                <a:latin typeface="Asap"/>
+                <a:ea typeface="Asap"/>
+                <a:cs typeface="Asap"/>
+                <a:sym typeface="Asap"/>
+              </a:rPr>
+              <a:t>membuktikan</a:t>
+            </a:r>
+            <a:r>
+              <a:rPr lang="en-US" sz="1600" dirty="0">
+                <a:latin typeface="Asap"/>
+                <a:ea typeface="Asap"/>
+                <a:cs typeface="Asap"/>
+                <a:sym typeface="Asap"/>
+              </a:rPr>
+              <a:t> </a:t>
+            </a:r>
+            <a:r>
+              <a:rPr lang="en-US" sz="1600" dirty="0" err="1">
+                <a:latin typeface="Asap"/>
+                <a:ea typeface="Asap"/>
+                <a:cs typeface="Asap"/>
+                <a:sym typeface="Asap"/>
+              </a:rPr>
+              <a:t>bahwa</a:t>
+            </a:r>
+            <a:r>
+              <a:rPr lang="en-US" sz="1600" dirty="0">
+                <a:latin typeface="Asap"/>
+                <a:ea typeface="Asap"/>
+                <a:cs typeface="Asap"/>
+                <a:sym typeface="Asap"/>
+              </a:rPr>
+              <a:t> </a:t>
+            </a:r>
+            <a:r>
+              <a:rPr lang="en-US" sz="1600" dirty="0" err="1">
+                <a:latin typeface="Asap"/>
+                <a:ea typeface="Asap"/>
+                <a:cs typeface="Asap"/>
+                <a:sym typeface="Asap"/>
+              </a:rPr>
+              <a:t>tingkat</a:t>
+            </a:r>
+            <a:r>
+              <a:rPr lang="en-US" sz="1600" dirty="0">
+                <a:latin typeface="Asap"/>
+                <a:ea typeface="Asap"/>
+                <a:cs typeface="Asap"/>
+                <a:sym typeface="Asap"/>
+              </a:rPr>
+              <a:t> </a:t>
+            </a:r>
+            <a:r>
+              <a:rPr lang="en-US" sz="1600" dirty="0" err="1">
+                <a:latin typeface="Asap"/>
+                <a:ea typeface="Asap"/>
+                <a:cs typeface="Asap"/>
+                <a:sym typeface="Asap"/>
+              </a:rPr>
+              <a:t>pendidikan</a:t>
+            </a:r>
+            <a:r>
+              <a:rPr lang="en-US" sz="1600" dirty="0">
+                <a:latin typeface="Asap"/>
+                <a:ea typeface="Asap"/>
+                <a:cs typeface="Asap"/>
+                <a:sym typeface="Asap"/>
+              </a:rPr>
+              <a:t> </a:t>
+            </a:r>
+            <a:r>
+              <a:rPr lang="en-US" sz="1600" dirty="0" err="1">
+                <a:latin typeface="Asap"/>
+                <a:ea typeface="Asap"/>
+                <a:cs typeface="Asap"/>
+                <a:sym typeface="Asap"/>
+              </a:rPr>
+              <a:t>memengaruhi</a:t>
+            </a:r>
+            <a:r>
+              <a:rPr lang="en-US" sz="1600" dirty="0">
+                <a:latin typeface="Asap"/>
+                <a:ea typeface="Asap"/>
+                <a:cs typeface="Asap"/>
+                <a:sym typeface="Asap"/>
+              </a:rPr>
+              <a:t> </a:t>
+            </a:r>
+            <a:r>
+              <a:rPr lang="en-US" sz="1600" dirty="0" err="1">
+                <a:latin typeface="Asap"/>
+                <a:ea typeface="Asap"/>
+                <a:cs typeface="Asap"/>
+                <a:sym typeface="Asap"/>
+              </a:rPr>
+              <a:t>suatu</a:t>
+            </a:r>
+            <a:r>
+              <a:rPr lang="en-US" sz="1600" dirty="0">
+                <a:latin typeface="Asap"/>
+                <a:ea typeface="Asap"/>
+                <a:cs typeface="Asap"/>
+                <a:sym typeface="Asap"/>
+              </a:rPr>
+              <a:t> </a:t>
+            </a:r>
+            <a:r>
+              <a:rPr lang="en-US" sz="1600" dirty="0" err="1">
+                <a:latin typeface="Asap"/>
+                <a:ea typeface="Asap"/>
+                <a:cs typeface="Asap"/>
+                <a:sym typeface="Asap"/>
+              </a:rPr>
+              <a:t>keputusan</a:t>
+            </a:r>
+            <a:r>
+              <a:rPr lang="en-US" sz="1600" dirty="0">
+                <a:latin typeface="Asap"/>
+                <a:ea typeface="Asap"/>
+                <a:cs typeface="Asap"/>
+                <a:sym typeface="Asap"/>
+              </a:rPr>
+              <a:t> </a:t>
+            </a:r>
+            <a:r>
+              <a:rPr lang="en-US" sz="1600" dirty="0" err="1">
+                <a:latin typeface="Asap"/>
+                <a:ea typeface="Asap"/>
+                <a:cs typeface="Asap"/>
+                <a:sym typeface="Asap"/>
+              </a:rPr>
+              <a:t>pinjaman</a:t>
+            </a:r>
+            <a:r>
+              <a:rPr lang="en-US" sz="1600" dirty="0">
+                <a:latin typeface="Asap"/>
+                <a:ea typeface="Asap"/>
+                <a:cs typeface="Asap"/>
+                <a:sym typeface="Asap"/>
+              </a:rPr>
+              <a:t> </a:t>
+            </a:r>
+            <a:r>
+              <a:rPr lang="en-US" sz="1600" dirty="0" err="1">
+                <a:latin typeface="Asap"/>
+                <a:ea typeface="Asap"/>
+                <a:cs typeface="Asap"/>
+                <a:sym typeface="Asap"/>
+              </a:rPr>
+              <a:t>bagi</a:t>
+            </a:r>
+            <a:r>
+              <a:rPr lang="en-US" sz="1600" dirty="0">
+                <a:latin typeface="Asap"/>
+                <a:ea typeface="Asap"/>
+                <a:cs typeface="Asap"/>
+                <a:sym typeface="Asap"/>
+              </a:rPr>
+              <a:t> </a:t>
+            </a:r>
+            <a:r>
+              <a:rPr lang="en-US" sz="1600" dirty="0" err="1">
+                <a:latin typeface="Asap"/>
+                <a:ea typeface="Asap"/>
+                <a:cs typeface="Asap"/>
+                <a:sym typeface="Asap"/>
+              </a:rPr>
+              <a:t>nasabah</a:t>
+            </a:r>
+            <a:r>
+              <a:rPr lang="en-US" sz="1600" dirty="0">
+                <a:latin typeface="Asap"/>
+                <a:ea typeface="Asap"/>
+                <a:cs typeface="Asap"/>
+                <a:sym typeface="Asap"/>
+              </a:rPr>
+              <a:t>, </a:t>
+            </a:r>
+            <a:r>
+              <a:rPr lang="en-US" sz="1600" dirty="0" err="1">
+                <a:latin typeface="Asap"/>
+                <a:ea typeface="Asap"/>
+                <a:cs typeface="Asap"/>
+                <a:sym typeface="Asap"/>
+              </a:rPr>
+              <a:t>dibuktikan</a:t>
+            </a:r>
+            <a:r>
+              <a:rPr lang="en-US" sz="1600" dirty="0">
+                <a:latin typeface="Asap"/>
+                <a:ea typeface="Asap"/>
+                <a:cs typeface="Asap"/>
+                <a:sym typeface="Asap"/>
+              </a:rPr>
+              <a:t> </a:t>
+            </a:r>
+            <a:r>
+              <a:rPr lang="en-US" sz="1600" dirty="0" err="1">
+                <a:latin typeface="Asap"/>
+                <a:ea typeface="Asap"/>
+                <a:cs typeface="Asap"/>
+                <a:sym typeface="Asap"/>
+              </a:rPr>
+              <a:t>dari</a:t>
+            </a:r>
+            <a:r>
+              <a:rPr lang="en-US" sz="1600" dirty="0">
+                <a:latin typeface="Asap"/>
+                <a:ea typeface="Asap"/>
+                <a:cs typeface="Asap"/>
+                <a:sym typeface="Asap"/>
+              </a:rPr>
+              <a:t> </a:t>
+            </a:r>
+            <a:r>
+              <a:rPr lang="en-US" sz="1600" dirty="0" err="1">
+                <a:latin typeface="Asap"/>
+                <a:ea typeface="Asap"/>
+                <a:cs typeface="Asap"/>
+                <a:sym typeface="Asap"/>
+              </a:rPr>
+              <a:t>tingkat</a:t>
+            </a:r>
+            <a:r>
+              <a:rPr lang="en-US" sz="1600" dirty="0">
+                <a:latin typeface="Asap"/>
+                <a:ea typeface="Asap"/>
+                <a:cs typeface="Asap"/>
+                <a:sym typeface="Asap"/>
+              </a:rPr>
+              <a:t> </a:t>
+            </a:r>
+            <a:r>
+              <a:rPr lang="en-US" sz="1600" dirty="0" err="1">
+                <a:latin typeface="Asap"/>
+                <a:ea typeface="Asap"/>
+                <a:cs typeface="Asap"/>
+                <a:sym typeface="Asap"/>
+              </a:rPr>
+              <a:t>pendidikan</a:t>
+            </a:r>
+            <a:r>
+              <a:rPr lang="en-US" sz="1600" dirty="0">
+                <a:latin typeface="Asap"/>
+                <a:ea typeface="Asap"/>
+                <a:cs typeface="Asap"/>
+                <a:sym typeface="Asap"/>
+              </a:rPr>
+              <a:t> academy degree </a:t>
+            </a:r>
+            <a:r>
+              <a:rPr lang="en-US" sz="1600" dirty="0" err="1">
+                <a:latin typeface="Asap"/>
+                <a:ea typeface="Asap"/>
+                <a:cs typeface="Asap"/>
+                <a:sym typeface="Asap"/>
+              </a:rPr>
+              <a:t>dibawah</a:t>
+            </a:r>
+            <a:r>
+              <a:rPr lang="en-US" sz="1600" dirty="0">
+                <a:latin typeface="Asap"/>
+                <a:ea typeface="Asap"/>
+                <a:cs typeface="Asap"/>
+                <a:sym typeface="Asap"/>
+              </a:rPr>
+              <a:t> 2%.</a:t>
+            </a:r>
+            <a:endParaRPr lang="en-ID" sz="1600" dirty="0"/>
+          </a:p>
+          <a:p>
+            <a:pPr marL="0" lvl="0" indent="0" algn="l"/>
+            <a:endParaRPr lang="en-US" sz="1600" dirty="0">
+              <a:latin typeface="Asap"/>
+              <a:ea typeface="Asap"/>
+              <a:cs typeface="Asap"/>
+              <a:sym typeface="Asap"/>
+            </a:endParaRPr>
+          </a:p>
+        </p:txBody>
+      </p:sp>
+      <p:sp>
+        <p:nvSpPr>
+          <p:cNvPr id="8" name="TextBox 13">
+            <a:extLst>
+              <a:ext uri="{FF2B5EF4-FFF2-40B4-BE49-F238E27FC236}">
+                <a16:creationId xmlns:a16="http://schemas.microsoft.com/office/drawing/2014/main" id="{62487CFD-0267-558E-34FA-0CFC75620185}"/>
+              </a:ext>
+            </a:extLst>
+          </p:cNvPr>
+          <p:cNvSpPr txBox="1"/>
+          <p:nvPr/>
+        </p:nvSpPr>
+        <p:spPr>
+          <a:xfrm>
+            <a:off x="534759" y="3258028"/>
+            <a:ext cx="5439322" cy="920637"/>
+          </a:xfrm>
+          <a:prstGeom prst="rect">
+            <a:avLst/>
+          </a:prstGeom>
+        </p:spPr>
+        <p:txBody>
+          <a:bodyPr wrap="square" lIns="0" tIns="0" rIns="0" bIns="0" rtlCol="0" anchor="t">
+            <a:spAutoFit/>
+          </a:bodyPr>
+          <a:lstStyle/>
+          <a:p>
+            <a:pPr marL="0" lvl="0" indent="0" algn="l">
+              <a:lnSpc>
+                <a:spcPts val="8630"/>
+              </a:lnSpc>
+            </a:pPr>
+            <a:r>
+              <a:rPr lang="en-US" sz="3200" b="1" dirty="0">
+                <a:latin typeface="Noto Serif Bengali SemiCondensed Heavy"/>
+                <a:ea typeface="Noto Serif Bengali SemiCondensed Heavy"/>
+                <a:cs typeface="Noto Serif Bengali SemiCondensed Heavy"/>
+                <a:sym typeface="Noto Serif Bengali SemiCondensed Heavy"/>
+              </a:rPr>
+              <a:t>Business Recommendation</a:t>
+            </a:r>
+          </a:p>
+        </p:txBody>
+      </p:sp>
+      <p:sp>
+        <p:nvSpPr>
+          <p:cNvPr id="9" name="TextBox 14">
+            <a:extLst>
+              <a:ext uri="{FF2B5EF4-FFF2-40B4-BE49-F238E27FC236}">
+                <a16:creationId xmlns:a16="http://schemas.microsoft.com/office/drawing/2014/main" id="{24C06EFE-8184-79EE-018E-A8F01EBA15A5}"/>
+              </a:ext>
+            </a:extLst>
+          </p:cNvPr>
+          <p:cNvSpPr txBox="1"/>
+          <p:nvPr/>
+        </p:nvSpPr>
+        <p:spPr>
+          <a:xfrm>
+            <a:off x="534759" y="4333897"/>
+            <a:ext cx="5561241" cy="1969770"/>
+          </a:xfrm>
+          <a:prstGeom prst="rect">
+            <a:avLst/>
+          </a:prstGeom>
+        </p:spPr>
+        <p:txBody>
+          <a:bodyPr wrap="square" lIns="0" tIns="0" rIns="0" bIns="0" rtlCol="0" anchor="t">
+            <a:spAutoFit/>
+          </a:bodyPr>
+          <a:lstStyle/>
+          <a:p>
+            <a:pPr marL="342900" indent="-342900">
+              <a:buAutoNum type="arabicPeriod"/>
+            </a:pPr>
+            <a:r>
+              <a:rPr lang="en-US" sz="1600" dirty="0">
+                <a:latin typeface="Asap"/>
+                <a:ea typeface="Asap"/>
+                <a:cs typeface="Asap"/>
+                <a:sym typeface="Asap"/>
+              </a:rPr>
+              <a:t>Saran </a:t>
+            </a:r>
+            <a:r>
+              <a:rPr lang="en-US" sz="1600" dirty="0" err="1">
+                <a:latin typeface="Asap"/>
+                <a:ea typeface="Asap"/>
+                <a:cs typeface="Asap"/>
+                <a:sym typeface="Asap"/>
+              </a:rPr>
+              <a:t>dari</a:t>
+            </a:r>
+            <a:r>
+              <a:rPr lang="en-US" sz="1600" dirty="0">
+                <a:latin typeface="Asap"/>
+                <a:ea typeface="Asap"/>
+                <a:cs typeface="Asap"/>
+                <a:sym typeface="Asap"/>
+              </a:rPr>
+              <a:t> </a:t>
+            </a:r>
+            <a:r>
+              <a:rPr lang="en-US" sz="1600" dirty="0" err="1">
+                <a:latin typeface="Asap"/>
+                <a:ea typeface="Asap"/>
+                <a:cs typeface="Asap"/>
+                <a:sym typeface="Asap"/>
+              </a:rPr>
+              <a:t>saya</a:t>
+            </a:r>
+            <a:r>
+              <a:rPr lang="en-US" sz="1600" dirty="0">
+                <a:latin typeface="Asap"/>
+                <a:ea typeface="Asap"/>
+                <a:cs typeface="Asap"/>
+                <a:sym typeface="Asap"/>
+              </a:rPr>
+              <a:t> </a:t>
+            </a:r>
+            <a:r>
+              <a:rPr lang="en-US" sz="1600" dirty="0" err="1">
+                <a:latin typeface="Asap"/>
+                <a:ea typeface="Asap"/>
+                <a:cs typeface="Asap"/>
+                <a:sym typeface="Asap"/>
+              </a:rPr>
+              <a:t>sebaiknya</a:t>
+            </a:r>
+            <a:r>
+              <a:rPr lang="en-US" sz="1600" dirty="0">
+                <a:latin typeface="Asap"/>
+                <a:ea typeface="Asap"/>
+                <a:cs typeface="Asap"/>
+                <a:sym typeface="Asap"/>
+              </a:rPr>
+              <a:t> </a:t>
+            </a:r>
+            <a:r>
+              <a:rPr lang="en-US" sz="1600" dirty="0" err="1">
+                <a:latin typeface="Asap"/>
+                <a:ea typeface="Asap"/>
+                <a:cs typeface="Asap"/>
+                <a:sym typeface="Asap"/>
+              </a:rPr>
+              <a:t>perusahaan</a:t>
+            </a:r>
+            <a:r>
+              <a:rPr lang="en-US" sz="1600" dirty="0">
+                <a:latin typeface="Asap"/>
+                <a:ea typeface="Asap"/>
+                <a:cs typeface="Asap"/>
+                <a:sym typeface="Asap"/>
+              </a:rPr>
+              <a:t> </a:t>
+            </a:r>
+            <a:r>
+              <a:rPr lang="en-US" sz="1600" dirty="0" err="1">
+                <a:latin typeface="Asap"/>
+                <a:ea typeface="Asap"/>
+                <a:cs typeface="Asap"/>
+                <a:sym typeface="Asap"/>
+              </a:rPr>
+              <a:t>membuat</a:t>
+            </a:r>
+            <a:r>
+              <a:rPr lang="en-US" sz="1600" dirty="0">
+                <a:latin typeface="Asap"/>
+                <a:ea typeface="Asap"/>
+                <a:cs typeface="Asap"/>
+                <a:sym typeface="Asap"/>
+              </a:rPr>
+              <a:t> </a:t>
+            </a:r>
+            <a:r>
+              <a:rPr lang="en-US" sz="1600" dirty="0" err="1">
+                <a:latin typeface="Asap"/>
+                <a:ea typeface="Asap"/>
+                <a:cs typeface="Asap"/>
+                <a:sym typeface="Asap"/>
+              </a:rPr>
+              <a:t>suatu</a:t>
+            </a:r>
+            <a:r>
+              <a:rPr lang="en-US" sz="1600" dirty="0">
+                <a:latin typeface="Asap"/>
+                <a:ea typeface="Asap"/>
+                <a:cs typeface="Asap"/>
+                <a:sym typeface="Asap"/>
+              </a:rPr>
+              <a:t> </a:t>
+            </a:r>
+            <a:r>
+              <a:rPr lang="en-US" sz="1600" dirty="0" err="1">
+                <a:latin typeface="Asap"/>
+                <a:ea typeface="Asap"/>
+                <a:cs typeface="Asap"/>
+                <a:sym typeface="Asap"/>
+              </a:rPr>
+              <a:t>sistem</a:t>
+            </a:r>
+            <a:r>
+              <a:rPr lang="en-US" sz="1600" dirty="0">
+                <a:latin typeface="Asap"/>
+                <a:ea typeface="Asap"/>
+                <a:cs typeface="Asap"/>
+                <a:sym typeface="Asap"/>
+              </a:rPr>
+              <a:t> </a:t>
+            </a:r>
+            <a:r>
+              <a:rPr lang="en-US" sz="1600" dirty="0" err="1">
+                <a:latin typeface="Asap"/>
+                <a:ea typeface="Asap"/>
+                <a:cs typeface="Asap"/>
+                <a:sym typeface="Asap"/>
+              </a:rPr>
+              <a:t>otomasi</a:t>
+            </a:r>
+            <a:r>
+              <a:rPr lang="en-US" sz="1600" dirty="0">
+                <a:latin typeface="Asap"/>
+                <a:ea typeface="Asap"/>
+                <a:cs typeface="Asap"/>
+                <a:sym typeface="Asap"/>
+              </a:rPr>
+              <a:t> </a:t>
+            </a:r>
+            <a:r>
+              <a:rPr lang="en-US" sz="1600" dirty="0" err="1">
+                <a:latin typeface="Asap"/>
+                <a:ea typeface="Asap"/>
+                <a:cs typeface="Asap"/>
+                <a:sym typeface="Asap"/>
+              </a:rPr>
+              <a:t>berdasarkan</a:t>
+            </a:r>
+            <a:r>
+              <a:rPr lang="en-US" sz="1600" dirty="0">
+                <a:latin typeface="Asap"/>
+                <a:ea typeface="Asap"/>
+                <a:cs typeface="Asap"/>
+                <a:sym typeface="Asap"/>
+              </a:rPr>
+              <a:t> limit </a:t>
+            </a:r>
+            <a:r>
+              <a:rPr lang="en-US" sz="1600" dirty="0" err="1">
+                <a:latin typeface="Asap"/>
+                <a:ea typeface="Asap"/>
+                <a:cs typeface="Asap"/>
+                <a:sym typeface="Asap"/>
+              </a:rPr>
+              <a:t>pinjaman</a:t>
+            </a:r>
+            <a:r>
+              <a:rPr lang="en-US" sz="1600" dirty="0">
+                <a:latin typeface="Asap"/>
+                <a:ea typeface="Asap"/>
+                <a:cs typeface="Asap"/>
+                <a:sym typeface="Asap"/>
+              </a:rPr>
+              <a:t> per </a:t>
+            </a:r>
+            <a:r>
+              <a:rPr lang="en-US" sz="1600" dirty="0" err="1">
+                <a:latin typeface="Asap"/>
+                <a:ea typeface="Asap"/>
+                <a:cs typeface="Asap"/>
+                <a:sym typeface="Asap"/>
+              </a:rPr>
+              <a:t>kategori</a:t>
+            </a:r>
+            <a:r>
+              <a:rPr lang="en-US" sz="1600" dirty="0">
+                <a:latin typeface="Asap"/>
+                <a:ea typeface="Asap"/>
+                <a:cs typeface="Asap"/>
+                <a:sym typeface="Asap"/>
+              </a:rPr>
+              <a:t> </a:t>
+            </a:r>
+            <a:r>
+              <a:rPr lang="en-US" sz="1600" dirty="0" err="1">
+                <a:latin typeface="Asap"/>
+                <a:ea typeface="Asap"/>
+                <a:cs typeface="Asap"/>
+                <a:sym typeface="Asap"/>
+              </a:rPr>
+              <a:t>tingkat</a:t>
+            </a:r>
+            <a:r>
+              <a:rPr lang="en-US" sz="1600" dirty="0">
+                <a:latin typeface="Asap"/>
+                <a:ea typeface="Asap"/>
+                <a:cs typeface="Asap"/>
+                <a:sym typeface="Asap"/>
+              </a:rPr>
+              <a:t> </a:t>
+            </a:r>
+            <a:r>
+              <a:rPr lang="en-US" sz="1600" dirty="0" err="1">
+                <a:latin typeface="Asap"/>
+                <a:ea typeface="Asap"/>
+                <a:cs typeface="Asap"/>
+                <a:sym typeface="Asap"/>
+              </a:rPr>
+              <a:t>pendidikan</a:t>
+            </a:r>
+            <a:r>
+              <a:rPr lang="en-US" sz="1600" dirty="0">
+                <a:latin typeface="Asap"/>
+                <a:ea typeface="Asap"/>
+                <a:cs typeface="Asap"/>
+                <a:sym typeface="Asap"/>
+              </a:rPr>
+              <a:t>, </a:t>
+            </a:r>
+            <a:r>
+              <a:rPr lang="en-US" sz="1600" dirty="0" err="1">
+                <a:latin typeface="Asap"/>
+                <a:ea typeface="Asap"/>
+                <a:cs typeface="Asap"/>
+                <a:sym typeface="Asap"/>
+              </a:rPr>
+              <a:t>aku</a:t>
+            </a:r>
+            <a:r>
+              <a:rPr lang="en-US" sz="1600" dirty="0">
+                <a:latin typeface="Asap"/>
+                <a:ea typeface="Asap"/>
+                <a:cs typeface="Asap"/>
+                <a:sym typeface="Asap"/>
+              </a:rPr>
+              <a:t> rasa </a:t>
+            </a:r>
+            <a:r>
+              <a:rPr lang="en-US" sz="1600" dirty="0" err="1">
+                <a:latin typeface="Asap"/>
+                <a:ea typeface="Asap"/>
+                <a:cs typeface="Asap"/>
+                <a:sym typeface="Asap"/>
+              </a:rPr>
+              <a:t>hal</a:t>
+            </a:r>
+            <a:r>
+              <a:rPr lang="en-US" sz="1600" dirty="0">
+                <a:latin typeface="Asap"/>
+                <a:ea typeface="Asap"/>
+                <a:cs typeface="Asap"/>
+                <a:sym typeface="Asap"/>
+              </a:rPr>
+              <a:t> </a:t>
+            </a:r>
+            <a:r>
+              <a:rPr lang="en-US" sz="1600" dirty="0" err="1">
+                <a:latin typeface="Asap"/>
+                <a:ea typeface="Asap"/>
+                <a:cs typeface="Asap"/>
+                <a:sym typeface="Asap"/>
+              </a:rPr>
+              <a:t>tersebut</a:t>
+            </a:r>
+            <a:r>
+              <a:rPr lang="en-US" sz="1600" dirty="0">
+                <a:latin typeface="Asap"/>
+                <a:ea typeface="Asap"/>
+                <a:cs typeface="Asap"/>
+                <a:sym typeface="Asap"/>
+              </a:rPr>
+              <a:t> </a:t>
+            </a:r>
+            <a:r>
+              <a:rPr lang="en-US" sz="1600" dirty="0" err="1">
+                <a:latin typeface="Asap"/>
+                <a:ea typeface="Asap"/>
+                <a:cs typeface="Asap"/>
+                <a:sym typeface="Asap"/>
+              </a:rPr>
+              <a:t>efektif</a:t>
+            </a:r>
+            <a:r>
+              <a:rPr lang="en-US" sz="1600" dirty="0">
+                <a:latin typeface="Asap"/>
+                <a:ea typeface="Asap"/>
+                <a:cs typeface="Asap"/>
+                <a:sym typeface="Asap"/>
+              </a:rPr>
+              <a:t> </a:t>
+            </a:r>
+            <a:r>
+              <a:rPr lang="en-US" sz="1600" dirty="0" err="1">
+                <a:latin typeface="Asap"/>
+                <a:ea typeface="Asap"/>
+                <a:cs typeface="Asap"/>
+                <a:sym typeface="Asap"/>
+              </a:rPr>
+              <a:t>untuk</a:t>
+            </a:r>
+            <a:r>
+              <a:rPr lang="en-US" sz="1600" dirty="0">
+                <a:latin typeface="Asap"/>
+                <a:ea typeface="Asap"/>
+                <a:cs typeface="Asap"/>
+                <a:sym typeface="Asap"/>
+              </a:rPr>
+              <a:t> </a:t>
+            </a:r>
+            <a:r>
+              <a:rPr lang="en-US" sz="1600" dirty="0" err="1">
+                <a:latin typeface="Asap"/>
+                <a:ea typeface="Asap"/>
+                <a:cs typeface="Asap"/>
+                <a:sym typeface="Asap"/>
+              </a:rPr>
+              <a:t>melacak</a:t>
+            </a:r>
+            <a:r>
+              <a:rPr lang="en-US" sz="1600" dirty="0">
+                <a:latin typeface="Asap"/>
+                <a:ea typeface="Asap"/>
+                <a:cs typeface="Asap"/>
+                <a:sym typeface="Asap"/>
+              </a:rPr>
+              <a:t> </a:t>
+            </a:r>
+            <a:r>
+              <a:rPr lang="en-US" sz="1600" dirty="0" err="1">
+                <a:latin typeface="Asap"/>
+                <a:ea typeface="Asap"/>
+                <a:cs typeface="Asap"/>
+                <a:sym typeface="Asap"/>
+              </a:rPr>
+              <a:t>nasabah</a:t>
+            </a:r>
+            <a:r>
+              <a:rPr lang="en-US" sz="1600" dirty="0">
+                <a:latin typeface="Asap"/>
+                <a:ea typeface="Asap"/>
+                <a:cs typeface="Asap"/>
+                <a:sym typeface="Asap"/>
+              </a:rPr>
+              <a:t> </a:t>
+            </a:r>
+            <a:r>
+              <a:rPr lang="en-US" sz="1600" dirty="0" err="1">
+                <a:latin typeface="Asap"/>
+                <a:ea typeface="Asap"/>
+                <a:cs typeface="Asap"/>
+                <a:sym typeface="Asap"/>
+              </a:rPr>
+              <a:t>berisiko</a:t>
+            </a:r>
+            <a:r>
+              <a:rPr lang="en-US" sz="1600" dirty="0">
+                <a:latin typeface="Asap"/>
+                <a:ea typeface="Asap"/>
+                <a:cs typeface="Asap"/>
+                <a:sym typeface="Asap"/>
+              </a:rPr>
+              <a:t> </a:t>
+            </a:r>
+            <a:r>
+              <a:rPr lang="en-US" sz="1600" dirty="0" err="1">
+                <a:latin typeface="Asap"/>
+                <a:ea typeface="Asap"/>
+                <a:cs typeface="Asap"/>
+                <a:sym typeface="Asap"/>
+              </a:rPr>
+              <a:t>tinggi</a:t>
+            </a:r>
+            <a:r>
+              <a:rPr lang="en-US" sz="1600" dirty="0">
+                <a:latin typeface="Asap"/>
+                <a:ea typeface="Asap"/>
+                <a:cs typeface="Asap"/>
+                <a:sym typeface="Asap"/>
+              </a:rPr>
+              <a:t>.  </a:t>
+            </a:r>
+          </a:p>
+          <a:p>
+            <a:pPr marL="342900" indent="-342900">
+              <a:buAutoNum type="arabicPeriod"/>
+            </a:pPr>
+            <a:r>
+              <a:rPr lang="en-US" sz="1600" dirty="0" err="1">
+                <a:latin typeface="Asap"/>
+                <a:sym typeface="Asap"/>
+              </a:rPr>
+              <a:t>Untuk</a:t>
+            </a:r>
+            <a:r>
+              <a:rPr lang="en-US" sz="1600" dirty="0">
+                <a:latin typeface="Asap"/>
+                <a:sym typeface="Asap"/>
+              </a:rPr>
+              <a:t> </a:t>
+            </a:r>
+            <a:r>
+              <a:rPr lang="en-US" sz="1600" dirty="0" err="1">
+                <a:latin typeface="Asap"/>
+                <a:sym typeface="Asap"/>
+              </a:rPr>
+              <a:t>menyasar</a:t>
+            </a:r>
+            <a:r>
+              <a:rPr lang="en-US" sz="1600" dirty="0">
+                <a:latin typeface="Asap"/>
+                <a:sym typeface="Asap"/>
+              </a:rPr>
+              <a:t> </a:t>
+            </a:r>
+            <a:r>
+              <a:rPr lang="en-US" sz="1600" dirty="0" err="1">
+                <a:latin typeface="Asap"/>
+                <a:sym typeface="Asap"/>
+              </a:rPr>
+              <a:t>tingkat</a:t>
+            </a:r>
+            <a:r>
+              <a:rPr lang="en-US" sz="1600" dirty="0">
+                <a:latin typeface="Asap"/>
+                <a:sym typeface="Asap"/>
+              </a:rPr>
+              <a:t> </a:t>
+            </a:r>
+            <a:r>
+              <a:rPr lang="en-US" sz="1600" dirty="0" err="1">
+                <a:latin typeface="Asap"/>
+                <a:sym typeface="Asap"/>
+              </a:rPr>
+              <a:t>pendidikan</a:t>
+            </a:r>
+            <a:r>
+              <a:rPr lang="en-US" sz="1600" dirty="0">
+                <a:latin typeface="Asap"/>
+                <a:sym typeface="Asap"/>
+              </a:rPr>
+              <a:t> lower secondary, </a:t>
+            </a:r>
+            <a:r>
+              <a:rPr lang="en-US" sz="1600" dirty="0" err="1">
+                <a:latin typeface="Asap"/>
+                <a:sym typeface="Asap"/>
+              </a:rPr>
+              <a:t>perusahaan</a:t>
+            </a:r>
+            <a:r>
+              <a:rPr lang="en-US" sz="1600" dirty="0">
+                <a:latin typeface="Asap"/>
+                <a:sym typeface="Asap"/>
+              </a:rPr>
+              <a:t> </a:t>
+            </a:r>
+            <a:r>
+              <a:rPr lang="en-US" sz="1600" dirty="0" err="1">
+                <a:latin typeface="Asap"/>
+                <a:sym typeface="Asap"/>
+              </a:rPr>
+              <a:t>bisa</a:t>
+            </a:r>
+            <a:r>
+              <a:rPr lang="en-US" sz="1600" dirty="0">
+                <a:latin typeface="Asap"/>
+                <a:sym typeface="Asap"/>
+              </a:rPr>
+              <a:t> </a:t>
+            </a:r>
+            <a:r>
+              <a:rPr lang="en-US" sz="1600" dirty="0" err="1">
+                <a:latin typeface="Asap"/>
+                <a:sym typeface="Asap"/>
+              </a:rPr>
+              <a:t>membuat</a:t>
+            </a:r>
+            <a:r>
+              <a:rPr lang="en-US" sz="1600" dirty="0">
+                <a:latin typeface="Asap"/>
+                <a:sym typeface="Asap"/>
+              </a:rPr>
+              <a:t> program </a:t>
+            </a:r>
+            <a:r>
+              <a:rPr lang="en-US" sz="1600" dirty="0" err="1">
+                <a:latin typeface="Asap"/>
+                <a:sym typeface="Asap"/>
+              </a:rPr>
+              <a:t>literasi</a:t>
+            </a:r>
+            <a:r>
+              <a:rPr lang="en-US" sz="1600" dirty="0">
+                <a:latin typeface="Asap"/>
+                <a:sym typeface="Asap"/>
+              </a:rPr>
+              <a:t> </a:t>
+            </a:r>
+            <a:r>
+              <a:rPr lang="en-US" sz="1600" dirty="0" err="1">
+                <a:latin typeface="Asap"/>
+                <a:sym typeface="Asap"/>
+              </a:rPr>
+              <a:t>keuangan</a:t>
+            </a:r>
+            <a:r>
+              <a:rPr lang="en-US" sz="1600" dirty="0">
+                <a:latin typeface="Asap"/>
+                <a:sym typeface="Asap"/>
+              </a:rPr>
+              <a:t> agar </a:t>
+            </a:r>
+            <a:r>
+              <a:rPr lang="en-US" sz="1600" dirty="0" err="1">
+                <a:latin typeface="Asap"/>
+                <a:sym typeface="Asap"/>
+              </a:rPr>
+              <a:t>nasabah</a:t>
+            </a:r>
+            <a:r>
+              <a:rPr lang="en-US" sz="1600" dirty="0">
+                <a:latin typeface="Asap"/>
+                <a:sym typeface="Asap"/>
+              </a:rPr>
+              <a:t> </a:t>
+            </a:r>
+            <a:r>
+              <a:rPr lang="en-US" sz="1600" dirty="0" err="1">
+                <a:latin typeface="Asap"/>
+                <a:sym typeface="Asap"/>
+              </a:rPr>
+              <a:t>lebih</a:t>
+            </a:r>
+            <a:r>
+              <a:rPr lang="en-US" sz="1600" dirty="0">
+                <a:latin typeface="Asap"/>
+                <a:sym typeface="Asap"/>
+              </a:rPr>
+              <a:t> </a:t>
+            </a:r>
+            <a:r>
+              <a:rPr lang="en-US" sz="1600" dirty="0" err="1">
+                <a:latin typeface="Asap"/>
+                <a:sym typeface="Asap"/>
+              </a:rPr>
+              <a:t>mengenal</a:t>
+            </a:r>
+            <a:r>
+              <a:rPr lang="en-US" sz="1600" dirty="0">
+                <a:latin typeface="Asap"/>
+                <a:sym typeface="Asap"/>
+              </a:rPr>
+              <a:t> </a:t>
+            </a:r>
+            <a:r>
+              <a:rPr lang="en-US" sz="1600" dirty="0" err="1">
+                <a:latin typeface="Asap"/>
+                <a:sym typeface="Asap"/>
+              </a:rPr>
+              <a:t>jenis-jenis</a:t>
+            </a:r>
+            <a:r>
+              <a:rPr lang="en-US" sz="1600" dirty="0">
+                <a:latin typeface="Asap"/>
+                <a:sym typeface="Asap"/>
+              </a:rPr>
+              <a:t> </a:t>
+            </a:r>
+            <a:r>
+              <a:rPr lang="en-US" sz="1600" dirty="0" err="1">
+                <a:latin typeface="Asap"/>
+                <a:sym typeface="Asap"/>
+              </a:rPr>
+              <a:t>risiko</a:t>
+            </a:r>
+            <a:r>
+              <a:rPr lang="en-US" sz="1600" dirty="0">
+                <a:latin typeface="Asap"/>
+                <a:sym typeface="Asap"/>
+              </a:rPr>
+              <a:t> </a:t>
+            </a:r>
+            <a:r>
+              <a:rPr lang="en-US" sz="1600" dirty="0" err="1">
+                <a:latin typeface="Asap"/>
+                <a:sym typeface="Asap"/>
+              </a:rPr>
+              <a:t>dalam</a:t>
+            </a:r>
+            <a:r>
+              <a:rPr lang="en-US" sz="1600" dirty="0">
+                <a:latin typeface="Asap"/>
+                <a:sym typeface="Asap"/>
+              </a:rPr>
+              <a:t> </a:t>
+            </a:r>
+            <a:r>
+              <a:rPr lang="en-US" sz="1600" dirty="0" err="1">
+                <a:latin typeface="Asap"/>
+                <a:sym typeface="Asap"/>
+              </a:rPr>
+              <a:t>pinjaman</a:t>
+            </a:r>
+            <a:r>
+              <a:rPr lang="en-US" sz="1600" dirty="0">
+                <a:latin typeface="Asap"/>
+                <a:sym typeface="Asap"/>
+              </a:rPr>
+              <a:t>.</a:t>
+            </a:r>
+            <a:endParaRPr lang="en-ID" sz="1600" dirty="0"/>
+          </a:p>
+          <a:p>
+            <a:pPr marL="0" lvl="0" indent="0" algn="l"/>
+            <a:endParaRPr lang="en-US" sz="1600" dirty="0">
+              <a:latin typeface="Asap"/>
+              <a:ea typeface="Asap"/>
+              <a:cs typeface="Asap"/>
+              <a:sym typeface="Asap"/>
+            </a:endParaRPr>
+          </a:p>
+        </p:txBody>
+      </p:sp>
+      <p:pic>
+        <p:nvPicPr>
+          <p:cNvPr id="5" name="Picture 4">
+            <a:extLst>
+              <a:ext uri="{FF2B5EF4-FFF2-40B4-BE49-F238E27FC236}">
+                <a16:creationId xmlns:a16="http://schemas.microsoft.com/office/drawing/2014/main" id="{C6D45738-C96F-16AE-B245-EEF691B1BB60}"/>
+              </a:ext>
+            </a:extLst>
+          </p:cNvPr>
+          <p:cNvPicPr>
+            <a:picLocks noChangeAspect="1"/>
+          </p:cNvPicPr>
+          <p:nvPr/>
+        </p:nvPicPr>
+        <p:blipFill>
+          <a:blip r:embed="rId3">
+            <a:extLst>
+              <a:ext uri="{28A0092B-C50C-407E-A947-70E740481C1C}">
+                <a14:useLocalDpi xmlns:a14="http://schemas.microsoft.com/office/drawing/2010/main" val="0"/>
+              </a:ext>
+            </a:extLst>
+          </a:blip>
+          <a:stretch>
+            <a:fillRect/>
+          </a:stretch>
+        </p:blipFill>
+        <p:spPr>
+          <a:xfrm>
+            <a:off x="6472421" y="1521082"/>
+            <a:ext cx="5439322" cy="3815835"/>
+          </a:xfrm>
+          <a:prstGeom prst="rect">
+            <a:avLst/>
+          </a:prstGeom>
+        </p:spPr>
+      </p:pic>
+    </p:spTree>
+    <p:extLst>
+      <p:ext uri="{BB962C8B-B14F-4D97-AF65-F5344CB8AC3E}">
+        <p14:creationId xmlns:p14="http://schemas.microsoft.com/office/powerpoint/2010/main" val="1116310049"/>
+      </p:ext>
+    </p:extLst>
+  </p:cSld>
+  <p:clrMapOvr>
+    <a:masterClrMapping/>
+  </p:clrMapOvr>
+</p:sld>
+</file>
+
+<file path=ppt/slides/slide7.xml><?xml version="1.0" encoding="utf-8"?>
+<p:sld xmlns:a="http://schemas.openxmlformats.org/drawingml/2006/main" xmlns:r="http://schemas.openxmlformats.org/officeDocument/2006/relationships" xmlns:p="http://schemas.openxmlformats.org/presentationml/2006/main">
+  <p:cSld>
+    <p:spTree>
+      <p:nvGrpSpPr>
+        <p:cNvPr id="1" name="">
+          <a:extLst>
+            <a:ext uri="{FF2B5EF4-FFF2-40B4-BE49-F238E27FC236}">
+              <a16:creationId xmlns:a16="http://schemas.microsoft.com/office/drawing/2014/main" id="{B43835F3-8D6F-0FDD-8ACD-D326201BB91D}"/>
+            </a:ext>
+          </a:extLst>
+        </p:cNvPr>
+        <p:cNvGrpSpPr/>
+        <p:nvPr/>
+      </p:nvGrpSpPr>
+      <p:grpSpPr>
+        <a:xfrm>
+          <a:off x="0" y="0"/>
+          <a:ext cx="0" cy="0"/>
+          <a:chOff x="0" y="0"/>
+          <a:chExt cx="0" cy="0"/>
+        </a:xfrm>
+      </p:grpSpPr>
+      <p:pic>
+        <p:nvPicPr>
+          <p:cNvPr id="4" name="object 4">
+            <a:extLst>
+              <a:ext uri="{FF2B5EF4-FFF2-40B4-BE49-F238E27FC236}">
+                <a16:creationId xmlns:a16="http://schemas.microsoft.com/office/drawing/2014/main" id="{DBDA4A83-158E-6CCB-4D32-DEA3BB2B755A}"/>
+              </a:ext>
+            </a:extLst>
+          </p:cNvPr>
+          <p:cNvPicPr/>
+          <p:nvPr/>
+        </p:nvPicPr>
+        <p:blipFill>
+          <a:blip r:embed="rId2" cstate="print"/>
+          <a:stretch>
+            <a:fillRect/>
+          </a:stretch>
+        </p:blipFill>
+        <p:spPr>
+          <a:xfrm>
+            <a:off x="10714044" y="466932"/>
+            <a:ext cx="943197" cy="707397"/>
+          </a:xfrm>
+          <a:prstGeom prst="rect">
+            <a:avLst/>
+          </a:prstGeom>
+        </p:spPr>
+      </p:pic>
+      <p:sp>
+        <p:nvSpPr>
+          <p:cNvPr id="6" name="TextBox 13">
+            <a:extLst>
+              <a:ext uri="{FF2B5EF4-FFF2-40B4-BE49-F238E27FC236}">
+                <a16:creationId xmlns:a16="http://schemas.microsoft.com/office/drawing/2014/main" id="{C0EDC4EF-6CD7-8A2B-4985-ACA653B6B071}"/>
+              </a:ext>
+            </a:extLst>
+          </p:cNvPr>
+          <p:cNvSpPr txBox="1"/>
+          <p:nvPr/>
+        </p:nvSpPr>
+        <p:spPr>
+          <a:xfrm>
+            <a:off x="534759" y="1156079"/>
+            <a:ext cx="5683161" cy="984885"/>
+          </a:xfrm>
+          <a:prstGeom prst="rect">
+            <a:avLst/>
+          </a:prstGeom>
+        </p:spPr>
+        <p:txBody>
+          <a:bodyPr wrap="square" lIns="0" tIns="0" rIns="0" bIns="0" rtlCol="0" anchor="t">
+            <a:spAutoFit/>
+          </a:bodyPr>
+          <a:lstStyle/>
+          <a:p>
+            <a:pPr lvl="0"/>
+            <a:r>
+              <a:rPr lang="en-US" sz="3200" b="1" dirty="0">
+                <a:latin typeface="Noto Serif Bengali SemiCondensed Heavy"/>
+                <a:ea typeface="Noto Serif Bengali SemiCondensed Heavy"/>
+                <a:cs typeface="Noto Serif Bengali SemiCondensed Heavy"/>
+                <a:sym typeface="Noto Serif Bengali SemiCondensed Heavy"/>
+              </a:rPr>
+              <a:t>Hasil Analisis Persentase Gagal Bayar </a:t>
+            </a:r>
+            <a:r>
+              <a:rPr lang="en-US" sz="3200" b="1" dirty="0" err="1">
+                <a:latin typeface="Noto Serif Bengali SemiCondensed Heavy"/>
+                <a:ea typeface="Noto Serif Bengali SemiCondensed Heavy"/>
+                <a:cs typeface="Noto Serif Bengali SemiCondensed Heavy"/>
+                <a:sym typeface="Noto Serif Bengali SemiCondensed Heavy"/>
+              </a:rPr>
+              <a:t>berdasarkan</a:t>
+            </a:r>
+            <a:r>
+              <a:rPr lang="en-US" sz="3200" b="1" dirty="0">
+                <a:latin typeface="Noto Serif Bengali SemiCondensed Heavy"/>
+                <a:ea typeface="Noto Serif Bengali SemiCondensed Heavy"/>
+                <a:cs typeface="Noto Serif Bengali SemiCondensed Heavy"/>
+                <a:sym typeface="Noto Serif Bengali SemiCondensed Heavy"/>
+              </a:rPr>
+              <a:t> Gender</a:t>
+            </a:r>
+          </a:p>
+        </p:txBody>
+      </p:sp>
+      <p:sp>
+        <p:nvSpPr>
+          <p:cNvPr id="7" name="TextBox 14">
+            <a:extLst>
+              <a:ext uri="{FF2B5EF4-FFF2-40B4-BE49-F238E27FC236}">
+                <a16:creationId xmlns:a16="http://schemas.microsoft.com/office/drawing/2014/main" id="{203557C0-69ED-277E-44DB-8A63B31B0CDD}"/>
+              </a:ext>
+            </a:extLst>
+          </p:cNvPr>
+          <p:cNvSpPr txBox="1"/>
+          <p:nvPr/>
+        </p:nvSpPr>
+        <p:spPr>
+          <a:xfrm>
+            <a:off x="534759" y="2241021"/>
+            <a:ext cx="5683161" cy="1723549"/>
+          </a:xfrm>
+          <a:prstGeom prst="rect">
+            <a:avLst/>
+          </a:prstGeom>
+        </p:spPr>
+        <p:txBody>
+          <a:bodyPr wrap="square" lIns="0" tIns="0" rIns="0" bIns="0" rtlCol="0" anchor="t">
+            <a:spAutoFit/>
+          </a:bodyPr>
+          <a:lstStyle/>
+          <a:p>
+            <a:r>
+              <a:rPr lang="en-US" sz="1600" dirty="0" err="1">
+                <a:latin typeface="Asap"/>
+                <a:ea typeface="Asap"/>
+                <a:cs typeface="Asap"/>
+                <a:sym typeface="Asap"/>
+              </a:rPr>
+              <a:t>Berdasarkan</a:t>
+            </a:r>
+            <a:r>
+              <a:rPr lang="en-US" sz="1600" dirty="0">
+                <a:latin typeface="Asap"/>
+                <a:ea typeface="Asap"/>
+                <a:cs typeface="Asap"/>
+                <a:sym typeface="Asap"/>
+              </a:rPr>
+              <a:t> </a:t>
+            </a:r>
+            <a:r>
+              <a:rPr lang="en-US" sz="1600" dirty="0" err="1">
+                <a:latin typeface="Asap"/>
+                <a:ea typeface="Asap"/>
+                <a:cs typeface="Asap"/>
+                <a:sym typeface="Asap"/>
+              </a:rPr>
+              <a:t>hasil</a:t>
+            </a:r>
+            <a:r>
+              <a:rPr lang="en-US" sz="1600" dirty="0">
+                <a:latin typeface="Asap"/>
+                <a:ea typeface="Asap"/>
+                <a:cs typeface="Asap"/>
+                <a:sym typeface="Asap"/>
+              </a:rPr>
+              <a:t> </a:t>
+            </a:r>
+            <a:r>
+              <a:rPr lang="en-US" sz="1600" dirty="0" err="1">
+                <a:latin typeface="Asap"/>
+                <a:ea typeface="Asap"/>
+                <a:cs typeface="Asap"/>
+                <a:sym typeface="Asap"/>
+              </a:rPr>
+              <a:t>analisis</a:t>
+            </a:r>
+            <a:r>
+              <a:rPr lang="en-US" sz="1600" dirty="0">
+                <a:latin typeface="Asap"/>
+                <a:ea typeface="Asap"/>
+                <a:cs typeface="Asap"/>
+                <a:sym typeface="Asap"/>
+              </a:rPr>
+              <a:t> </a:t>
+            </a:r>
+            <a:r>
+              <a:rPr lang="en-US" sz="1600" dirty="0" err="1">
+                <a:latin typeface="Asap"/>
+                <a:ea typeface="Asap"/>
+                <a:cs typeface="Asap"/>
+                <a:sym typeface="Asap"/>
+              </a:rPr>
+              <a:t>persentase</a:t>
+            </a:r>
+            <a:r>
+              <a:rPr lang="en-US" sz="1600" dirty="0">
+                <a:latin typeface="Asap"/>
+                <a:ea typeface="Asap"/>
+                <a:cs typeface="Asap"/>
+                <a:sym typeface="Asap"/>
+              </a:rPr>
+              <a:t> </a:t>
+            </a:r>
+            <a:r>
+              <a:rPr lang="en-US" sz="1600" dirty="0" err="1">
+                <a:latin typeface="Asap"/>
+                <a:ea typeface="Asap"/>
+                <a:cs typeface="Asap"/>
+                <a:sym typeface="Asap"/>
+              </a:rPr>
+              <a:t>gagal</a:t>
+            </a:r>
+            <a:r>
+              <a:rPr lang="en-US" sz="1600" dirty="0">
+                <a:latin typeface="Asap"/>
+                <a:ea typeface="Asap"/>
+                <a:cs typeface="Asap"/>
+                <a:sym typeface="Asap"/>
+              </a:rPr>
+              <a:t> </a:t>
+            </a:r>
+            <a:r>
+              <a:rPr lang="en-US" sz="1600" dirty="0" err="1">
+                <a:latin typeface="Asap"/>
+                <a:ea typeface="Asap"/>
+                <a:cs typeface="Asap"/>
+                <a:sym typeface="Asap"/>
+              </a:rPr>
+              <a:t>bayar</a:t>
+            </a:r>
+            <a:r>
+              <a:rPr lang="en-US" sz="1600" dirty="0">
+                <a:latin typeface="Asap"/>
+                <a:ea typeface="Asap"/>
+                <a:cs typeface="Asap"/>
+                <a:sym typeface="Asap"/>
+              </a:rPr>
+              <a:t> </a:t>
+            </a:r>
+            <a:r>
+              <a:rPr lang="en-US" sz="1600" dirty="0" err="1">
+                <a:latin typeface="Asap"/>
+                <a:ea typeface="Asap"/>
+                <a:cs typeface="Asap"/>
+                <a:sym typeface="Asap"/>
+              </a:rPr>
+              <a:t>berdasarkan</a:t>
+            </a:r>
+            <a:r>
+              <a:rPr lang="en-US" sz="1600" dirty="0">
+                <a:latin typeface="Asap"/>
+                <a:ea typeface="Asap"/>
+                <a:cs typeface="Asap"/>
+                <a:sym typeface="Asap"/>
+              </a:rPr>
+              <a:t> gender, </a:t>
+            </a:r>
+            <a:r>
+              <a:rPr lang="en-US" sz="1600" dirty="0" err="1">
+                <a:latin typeface="Asap"/>
+                <a:ea typeface="Asap"/>
+                <a:cs typeface="Asap"/>
+                <a:sym typeface="Asap"/>
+              </a:rPr>
+              <a:t>terdapat</a:t>
+            </a:r>
+            <a:r>
+              <a:rPr lang="en-US" sz="1600" dirty="0">
+                <a:latin typeface="Asap"/>
+                <a:ea typeface="Asap"/>
+                <a:cs typeface="Asap"/>
+                <a:sym typeface="Asap"/>
+              </a:rPr>
+              <a:t> insight </a:t>
+            </a:r>
+            <a:r>
+              <a:rPr lang="en-US" sz="1600" dirty="0" err="1">
+                <a:latin typeface="Asap"/>
+                <a:ea typeface="Asap"/>
+                <a:cs typeface="Asap"/>
+                <a:sym typeface="Asap"/>
+              </a:rPr>
+              <a:t>menarik</a:t>
+            </a:r>
+            <a:r>
+              <a:rPr lang="en-US" sz="1600" dirty="0">
+                <a:latin typeface="Asap"/>
+                <a:ea typeface="Asap"/>
+                <a:cs typeface="Asap"/>
+                <a:sym typeface="Asap"/>
+              </a:rPr>
+              <a:t>. </a:t>
+            </a:r>
+            <a:r>
+              <a:rPr lang="en-US" sz="1600" dirty="0" err="1">
+                <a:latin typeface="Asap"/>
+                <a:ea typeface="Asap"/>
+                <a:cs typeface="Asap"/>
+                <a:sym typeface="Asap"/>
+              </a:rPr>
+              <a:t>Untuk</a:t>
+            </a:r>
+            <a:r>
+              <a:rPr lang="en-US" sz="1600" dirty="0">
+                <a:latin typeface="Asap"/>
+                <a:ea typeface="Asap"/>
+                <a:cs typeface="Asap"/>
+                <a:sym typeface="Asap"/>
+              </a:rPr>
+              <a:t> </a:t>
+            </a:r>
+            <a:r>
+              <a:rPr lang="en-US" sz="1600" dirty="0" err="1">
+                <a:latin typeface="Asap"/>
+                <a:ea typeface="Asap"/>
+                <a:cs typeface="Asap"/>
+                <a:sym typeface="Asap"/>
+              </a:rPr>
+              <a:t>laki-laki</a:t>
+            </a:r>
+            <a:r>
+              <a:rPr lang="en-US" sz="1600" dirty="0">
+                <a:latin typeface="Asap"/>
+                <a:ea typeface="Asap"/>
+                <a:cs typeface="Asap"/>
+                <a:sym typeface="Asap"/>
+              </a:rPr>
+              <a:t> </a:t>
+            </a:r>
+            <a:r>
+              <a:rPr lang="en-US" sz="1600" dirty="0" err="1">
+                <a:latin typeface="Asap"/>
+                <a:ea typeface="Asap"/>
+                <a:cs typeface="Asap"/>
+                <a:sym typeface="Asap"/>
+              </a:rPr>
+              <a:t>memiliki</a:t>
+            </a:r>
+            <a:r>
+              <a:rPr lang="en-US" sz="1600" dirty="0">
+                <a:latin typeface="Asap"/>
+                <a:ea typeface="Asap"/>
+                <a:cs typeface="Asap"/>
+                <a:sym typeface="Asap"/>
+              </a:rPr>
+              <a:t> </a:t>
+            </a:r>
+            <a:r>
+              <a:rPr lang="en-US" sz="1600" dirty="0" err="1">
+                <a:latin typeface="Asap"/>
+                <a:ea typeface="Asap"/>
+                <a:cs typeface="Asap"/>
+                <a:sym typeface="Asap"/>
+              </a:rPr>
+              <a:t>persentase</a:t>
+            </a:r>
+            <a:r>
+              <a:rPr lang="en-US" sz="1600" dirty="0">
+                <a:latin typeface="Asap"/>
+                <a:ea typeface="Asap"/>
+                <a:cs typeface="Asap"/>
+                <a:sym typeface="Asap"/>
+              </a:rPr>
+              <a:t> </a:t>
+            </a:r>
+            <a:r>
+              <a:rPr lang="en-US" sz="1600" dirty="0" err="1">
+                <a:latin typeface="Asap"/>
+                <a:ea typeface="Asap"/>
+                <a:cs typeface="Asap"/>
+                <a:sym typeface="Asap"/>
+              </a:rPr>
+              <a:t>gagal</a:t>
+            </a:r>
+            <a:r>
+              <a:rPr lang="en-US" sz="1600" dirty="0">
+                <a:latin typeface="Asap"/>
+                <a:ea typeface="Asap"/>
+                <a:cs typeface="Asap"/>
+                <a:sym typeface="Asap"/>
+              </a:rPr>
+              <a:t> </a:t>
+            </a:r>
+            <a:r>
+              <a:rPr lang="en-US" sz="1600" dirty="0" err="1">
+                <a:latin typeface="Asap"/>
+                <a:ea typeface="Asap"/>
+                <a:cs typeface="Asap"/>
+                <a:sym typeface="Asap"/>
+              </a:rPr>
+              <a:t>bayar</a:t>
+            </a:r>
+            <a:r>
+              <a:rPr lang="en-US" sz="1600" dirty="0">
+                <a:latin typeface="Asap"/>
+                <a:ea typeface="Asap"/>
+                <a:cs typeface="Asap"/>
+                <a:sym typeface="Asap"/>
+              </a:rPr>
+              <a:t> yang </a:t>
+            </a:r>
+            <a:r>
+              <a:rPr lang="en-US" sz="1600" dirty="0" err="1">
+                <a:latin typeface="Asap"/>
+                <a:ea typeface="Asap"/>
+                <a:cs typeface="Asap"/>
+                <a:sym typeface="Asap"/>
+              </a:rPr>
+              <a:t>lebih</a:t>
+            </a:r>
+            <a:r>
+              <a:rPr lang="en-US" sz="1600" dirty="0">
+                <a:latin typeface="Asap"/>
+                <a:ea typeface="Asap"/>
+                <a:cs typeface="Asap"/>
+                <a:sym typeface="Asap"/>
+              </a:rPr>
+              <a:t> </a:t>
+            </a:r>
+            <a:r>
+              <a:rPr lang="en-US" sz="1600" dirty="0" err="1">
+                <a:latin typeface="Asap"/>
+                <a:ea typeface="Asap"/>
+                <a:cs typeface="Asap"/>
+                <a:sym typeface="Asap"/>
+              </a:rPr>
+              <a:t>tinggi</a:t>
+            </a:r>
+            <a:r>
+              <a:rPr lang="en-US" sz="1600" dirty="0">
+                <a:latin typeface="Asap"/>
+                <a:ea typeface="Asap"/>
+                <a:cs typeface="Asap"/>
+                <a:sym typeface="Asap"/>
+              </a:rPr>
+              <a:t> </a:t>
+            </a:r>
+            <a:r>
+              <a:rPr lang="en-US" sz="1600" dirty="0" err="1">
+                <a:latin typeface="Asap"/>
+                <a:ea typeface="Asap"/>
+                <a:cs typeface="Asap"/>
+                <a:sym typeface="Asap"/>
+              </a:rPr>
+              <a:t>yaitu</a:t>
+            </a:r>
+            <a:r>
+              <a:rPr lang="en-US" sz="1600" dirty="0">
+                <a:latin typeface="Asap"/>
+                <a:ea typeface="Asap"/>
+                <a:cs typeface="Asap"/>
+                <a:sym typeface="Asap"/>
+              </a:rPr>
+              <a:t> </a:t>
+            </a:r>
+            <a:r>
+              <a:rPr lang="en-US" sz="1600" dirty="0" err="1">
+                <a:latin typeface="Asap"/>
+                <a:ea typeface="Asap"/>
+                <a:cs typeface="Asap"/>
+                <a:sym typeface="Asap"/>
+              </a:rPr>
+              <a:t>diatas</a:t>
+            </a:r>
+            <a:r>
+              <a:rPr lang="en-US" sz="1600" dirty="0">
+                <a:latin typeface="Asap"/>
+                <a:ea typeface="Asap"/>
+                <a:cs typeface="Asap"/>
+                <a:sym typeface="Asap"/>
+              </a:rPr>
+              <a:t> (0.10) </a:t>
+            </a:r>
+            <a:r>
+              <a:rPr lang="en-US" sz="1600" dirty="0" err="1">
+                <a:latin typeface="Asap"/>
+                <a:ea typeface="Asap"/>
+                <a:cs typeface="Asap"/>
+                <a:sym typeface="Asap"/>
+              </a:rPr>
+              <a:t>atau</a:t>
+            </a:r>
+            <a:r>
+              <a:rPr lang="en-US" sz="1600" dirty="0">
+                <a:latin typeface="Asap"/>
+                <a:ea typeface="Asap"/>
+                <a:cs typeface="Asap"/>
+                <a:sym typeface="Asap"/>
+              </a:rPr>
+              <a:t> 10% </a:t>
+            </a:r>
+            <a:r>
+              <a:rPr lang="en-US" sz="1600" dirty="0" err="1">
+                <a:latin typeface="Asap"/>
+                <a:ea typeface="Asap"/>
+                <a:cs typeface="Asap"/>
+                <a:sym typeface="Asap"/>
+              </a:rPr>
+              <a:t>jika</a:t>
+            </a:r>
+            <a:r>
+              <a:rPr lang="en-US" sz="1600" dirty="0">
+                <a:latin typeface="Asap"/>
+                <a:ea typeface="Asap"/>
+                <a:cs typeface="Asap"/>
+                <a:sym typeface="Asap"/>
+              </a:rPr>
+              <a:t> </a:t>
+            </a:r>
+            <a:r>
+              <a:rPr lang="en-US" sz="1600" dirty="0" err="1">
+                <a:latin typeface="Asap"/>
+                <a:ea typeface="Asap"/>
+                <a:cs typeface="Asap"/>
+                <a:sym typeface="Asap"/>
+              </a:rPr>
+              <a:t>dibandingkan</a:t>
+            </a:r>
+            <a:r>
+              <a:rPr lang="en-US" sz="1600" dirty="0">
+                <a:latin typeface="Asap"/>
+                <a:ea typeface="Asap"/>
+                <a:cs typeface="Asap"/>
+                <a:sym typeface="Asap"/>
+              </a:rPr>
+              <a:t> </a:t>
+            </a:r>
+            <a:r>
+              <a:rPr lang="en-US" sz="1600" dirty="0" err="1">
+                <a:latin typeface="Asap"/>
+                <a:ea typeface="Asap"/>
+                <a:cs typeface="Asap"/>
+                <a:sym typeface="Asap"/>
+              </a:rPr>
+              <a:t>dengan</a:t>
+            </a:r>
+            <a:r>
+              <a:rPr lang="en-US" sz="1600" dirty="0">
+                <a:latin typeface="Asap"/>
+                <a:ea typeface="Asap"/>
+                <a:cs typeface="Asap"/>
+                <a:sym typeface="Asap"/>
+              </a:rPr>
+              <a:t> </a:t>
+            </a:r>
+            <a:r>
+              <a:rPr lang="en-US" sz="1600" dirty="0" err="1">
+                <a:latin typeface="Asap"/>
+                <a:ea typeface="Asap"/>
+                <a:cs typeface="Asap"/>
+                <a:sym typeface="Asap"/>
+              </a:rPr>
+              <a:t>perempuan</a:t>
+            </a:r>
+            <a:r>
+              <a:rPr lang="en-US" sz="1600" dirty="0">
+                <a:latin typeface="Asap"/>
+                <a:ea typeface="Asap"/>
+                <a:cs typeface="Asap"/>
+                <a:sym typeface="Asap"/>
+              </a:rPr>
+              <a:t> di </a:t>
+            </a:r>
+            <a:r>
+              <a:rPr lang="en-US" sz="1600" dirty="0" err="1">
+                <a:latin typeface="Asap"/>
+                <a:ea typeface="Asap"/>
+                <a:cs typeface="Asap"/>
+                <a:sym typeface="Asap"/>
+              </a:rPr>
+              <a:t>sekitar</a:t>
+            </a:r>
+            <a:r>
+              <a:rPr lang="en-US" sz="1600" dirty="0">
+                <a:latin typeface="Asap"/>
+                <a:ea typeface="Asap"/>
+                <a:cs typeface="Asap"/>
+                <a:sym typeface="Asap"/>
+              </a:rPr>
+              <a:t> (0.7) </a:t>
+            </a:r>
+            <a:r>
+              <a:rPr lang="en-US" sz="1600" dirty="0" err="1">
+                <a:latin typeface="Asap"/>
+                <a:ea typeface="Asap"/>
+                <a:cs typeface="Asap"/>
+                <a:sym typeface="Asap"/>
+              </a:rPr>
+              <a:t>atau</a:t>
+            </a:r>
+            <a:r>
+              <a:rPr lang="en-US" sz="1600" dirty="0">
+                <a:latin typeface="Asap"/>
+                <a:ea typeface="Asap"/>
+                <a:cs typeface="Asap"/>
+                <a:sym typeface="Asap"/>
+              </a:rPr>
+              <a:t> 7%. Hal </a:t>
+            </a:r>
+            <a:r>
+              <a:rPr lang="en-US" sz="1600" dirty="0" err="1">
+                <a:latin typeface="Asap"/>
+                <a:ea typeface="Asap"/>
+                <a:cs typeface="Asap"/>
+                <a:sym typeface="Asap"/>
+              </a:rPr>
+              <a:t>tersebut</a:t>
+            </a:r>
+            <a:r>
+              <a:rPr lang="en-US" sz="1600" dirty="0">
+                <a:latin typeface="Asap"/>
+                <a:ea typeface="Asap"/>
+                <a:cs typeface="Asap"/>
+                <a:sym typeface="Asap"/>
+              </a:rPr>
+              <a:t> </a:t>
+            </a:r>
+            <a:r>
+              <a:rPr lang="en-US" sz="1600" dirty="0" err="1">
+                <a:latin typeface="Asap"/>
+                <a:ea typeface="Asap"/>
+                <a:cs typeface="Asap"/>
+                <a:sym typeface="Asap"/>
+              </a:rPr>
+              <a:t>menunjukkan</a:t>
+            </a:r>
+            <a:r>
+              <a:rPr lang="en-US" sz="1600" dirty="0">
+                <a:latin typeface="Asap"/>
+                <a:ea typeface="Asap"/>
+                <a:cs typeface="Asap"/>
+                <a:sym typeface="Asap"/>
+              </a:rPr>
+              <a:t> </a:t>
+            </a:r>
+            <a:r>
+              <a:rPr lang="en-US" sz="1600" dirty="0" err="1">
+                <a:latin typeface="Asap"/>
+                <a:ea typeface="Asap"/>
+                <a:cs typeface="Asap"/>
+                <a:sym typeface="Asap"/>
+              </a:rPr>
+              <a:t>bahwa</a:t>
+            </a:r>
+            <a:r>
+              <a:rPr lang="en-US" sz="1600" dirty="0">
+                <a:latin typeface="Asap"/>
+                <a:ea typeface="Asap"/>
+                <a:cs typeface="Asap"/>
+                <a:sym typeface="Asap"/>
+              </a:rPr>
+              <a:t> </a:t>
+            </a:r>
+            <a:r>
+              <a:rPr lang="en-US" sz="1600" dirty="0" err="1">
+                <a:latin typeface="Asap"/>
+                <a:ea typeface="Asap"/>
+                <a:cs typeface="Asap"/>
+                <a:sym typeface="Asap"/>
+              </a:rPr>
+              <a:t>perilaku</a:t>
+            </a:r>
+            <a:r>
+              <a:rPr lang="en-US" sz="1600" dirty="0">
+                <a:latin typeface="Asap"/>
+                <a:ea typeface="Asap"/>
+                <a:cs typeface="Asap"/>
+                <a:sym typeface="Asap"/>
+              </a:rPr>
+              <a:t> </a:t>
+            </a:r>
+            <a:r>
+              <a:rPr lang="en-US" sz="1600" dirty="0" err="1">
+                <a:latin typeface="Asap"/>
+                <a:ea typeface="Asap"/>
+                <a:cs typeface="Asap"/>
+                <a:sym typeface="Asap"/>
+              </a:rPr>
+              <a:t>pengajuan</a:t>
+            </a:r>
+            <a:r>
+              <a:rPr lang="en-US" sz="1600" dirty="0">
+                <a:latin typeface="Asap"/>
+                <a:ea typeface="Asap"/>
+                <a:cs typeface="Asap"/>
+                <a:sym typeface="Asap"/>
+              </a:rPr>
+              <a:t> </a:t>
+            </a:r>
+            <a:r>
+              <a:rPr lang="en-US" sz="1600" dirty="0" err="1">
+                <a:latin typeface="Asap"/>
+                <a:ea typeface="Asap"/>
+                <a:cs typeface="Asap"/>
+                <a:sym typeface="Asap"/>
+              </a:rPr>
+              <a:t>kredit</a:t>
+            </a:r>
+            <a:r>
+              <a:rPr lang="en-US" sz="1600" dirty="0">
+                <a:latin typeface="Asap"/>
+                <a:ea typeface="Asap"/>
+                <a:cs typeface="Asap"/>
+                <a:sym typeface="Asap"/>
+              </a:rPr>
+              <a:t> </a:t>
+            </a:r>
+            <a:r>
+              <a:rPr lang="en-US" sz="1600" dirty="0" err="1">
+                <a:latin typeface="Asap"/>
+                <a:ea typeface="Asap"/>
+                <a:cs typeface="Asap"/>
+                <a:sym typeface="Asap"/>
+              </a:rPr>
+              <a:t>laki-laki</a:t>
+            </a:r>
+            <a:r>
+              <a:rPr lang="en-US" sz="1600" dirty="0">
+                <a:latin typeface="Asap"/>
+                <a:ea typeface="Asap"/>
+                <a:cs typeface="Asap"/>
+                <a:sym typeface="Asap"/>
+              </a:rPr>
+              <a:t> </a:t>
+            </a:r>
+            <a:r>
+              <a:rPr lang="en-US" sz="1600" dirty="0" err="1">
+                <a:latin typeface="Asap"/>
+                <a:ea typeface="Asap"/>
+                <a:cs typeface="Asap"/>
+                <a:sym typeface="Asap"/>
+              </a:rPr>
+              <a:t>lebih</a:t>
+            </a:r>
+            <a:r>
+              <a:rPr lang="en-US" sz="1600" dirty="0">
+                <a:latin typeface="Asap"/>
+                <a:ea typeface="Asap"/>
+                <a:cs typeface="Asap"/>
+                <a:sym typeface="Asap"/>
+              </a:rPr>
+              <a:t> </a:t>
+            </a:r>
+            <a:r>
+              <a:rPr lang="en-US" sz="1600" dirty="0" err="1">
+                <a:latin typeface="Asap"/>
+                <a:ea typeface="Asap"/>
+                <a:cs typeface="Asap"/>
+                <a:sym typeface="Asap"/>
+              </a:rPr>
+              <a:t>berisiko</a:t>
+            </a:r>
+            <a:r>
+              <a:rPr lang="en-US" sz="1600" dirty="0">
+                <a:latin typeface="Asap"/>
+                <a:ea typeface="Asap"/>
+                <a:cs typeface="Asap"/>
+                <a:sym typeface="Asap"/>
+              </a:rPr>
+              <a:t> </a:t>
+            </a:r>
+            <a:r>
+              <a:rPr lang="en-US" sz="1600" dirty="0" err="1">
+                <a:latin typeface="Asap"/>
+                <a:ea typeface="Asap"/>
+                <a:cs typeface="Asap"/>
+                <a:sym typeface="Asap"/>
+              </a:rPr>
+              <a:t>dibandingkan</a:t>
+            </a:r>
+            <a:r>
+              <a:rPr lang="en-US" sz="1600" dirty="0">
+                <a:latin typeface="Asap"/>
+                <a:ea typeface="Asap"/>
+                <a:cs typeface="Asap"/>
+                <a:sym typeface="Asap"/>
+              </a:rPr>
+              <a:t> </a:t>
+            </a:r>
+            <a:r>
+              <a:rPr lang="en-US" sz="1600" dirty="0" err="1">
+                <a:latin typeface="Asap"/>
+                <a:ea typeface="Asap"/>
+                <a:cs typeface="Asap"/>
+                <a:sym typeface="Asap"/>
+              </a:rPr>
+              <a:t>perempuan</a:t>
+            </a:r>
+            <a:r>
+              <a:rPr lang="en-US" sz="1600" dirty="0">
+                <a:latin typeface="Asap"/>
+                <a:ea typeface="Asap"/>
+                <a:cs typeface="Asap"/>
+                <a:sym typeface="Asap"/>
+              </a:rPr>
+              <a:t>.</a:t>
+            </a:r>
+            <a:endParaRPr lang="en-ID" sz="1600" dirty="0"/>
+          </a:p>
+          <a:p>
+            <a:pPr marL="0" lvl="0" indent="0" algn="l"/>
+            <a:endParaRPr lang="en-US" sz="1600" dirty="0">
+              <a:latin typeface="Asap"/>
+              <a:ea typeface="Asap"/>
+              <a:cs typeface="Asap"/>
+              <a:sym typeface="Asap"/>
+            </a:endParaRPr>
+          </a:p>
+        </p:txBody>
+      </p:sp>
+      <p:sp>
+        <p:nvSpPr>
+          <p:cNvPr id="8" name="TextBox 13">
+            <a:extLst>
+              <a:ext uri="{FF2B5EF4-FFF2-40B4-BE49-F238E27FC236}">
+                <a16:creationId xmlns:a16="http://schemas.microsoft.com/office/drawing/2014/main" id="{7EA71126-0AED-C76D-DEE1-5EBE5D1DD6E1}"/>
+              </a:ext>
+            </a:extLst>
+          </p:cNvPr>
+          <p:cNvSpPr txBox="1"/>
+          <p:nvPr/>
+        </p:nvSpPr>
+        <p:spPr>
+          <a:xfrm>
+            <a:off x="534759" y="3258028"/>
+            <a:ext cx="5439322" cy="920637"/>
+          </a:xfrm>
+          <a:prstGeom prst="rect">
+            <a:avLst/>
+          </a:prstGeom>
+        </p:spPr>
+        <p:txBody>
+          <a:bodyPr wrap="square" lIns="0" tIns="0" rIns="0" bIns="0" rtlCol="0" anchor="t">
+            <a:spAutoFit/>
+          </a:bodyPr>
+          <a:lstStyle/>
+          <a:p>
+            <a:pPr marL="0" lvl="0" indent="0" algn="l">
+              <a:lnSpc>
+                <a:spcPts val="8630"/>
+              </a:lnSpc>
+            </a:pPr>
+            <a:r>
+              <a:rPr lang="en-US" sz="3200" b="1" dirty="0">
+                <a:latin typeface="Noto Serif Bengali SemiCondensed Heavy"/>
+                <a:ea typeface="Noto Serif Bengali SemiCondensed Heavy"/>
+                <a:cs typeface="Noto Serif Bengali SemiCondensed Heavy"/>
+                <a:sym typeface="Noto Serif Bengali SemiCondensed Heavy"/>
+              </a:rPr>
+              <a:t>Business Recommendation</a:t>
+            </a:r>
+          </a:p>
+        </p:txBody>
+      </p:sp>
+      <p:sp>
+        <p:nvSpPr>
+          <p:cNvPr id="9" name="TextBox 14">
+            <a:extLst>
+              <a:ext uri="{FF2B5EF4-FFF2-40B4-BE49-F238E27FC236}">
+                <a16:creationId xmlns:a16="http://schemas.microsoft.com/office/drawing/2014/main" id="{519E9640-E21A-1EAE-90F0-5AC57D605BF4}"/>
+              </a:ext>
+            </a:extLst>
+          </p:cNvPr>
+          <p:cNvSpPr txBox="1"/>
+          <p:nvPr/>
+        </p:nvSpPr>
+        <p:spPr>
+          <a:xfrm>
+            <a:off x="534759" y="4333897"/>
+            <a:ext cx="5561241" cy="1723549"/>
+          </a:xfrm>
+          <a:prstGeom prst="rect">
+            <a:avLst/>
+          </a:prstGeom>
+        </p:spPr>
+        <p:txBody>
+          <a:bodyPr wrap="square" lIns="0" tIns="0" rIns="0" bIns="0" rtlCol="0" anchor="t">
+            <a:spAutoFit/>
+          </a:bodyPr>
+          <a:lstStyle/>
+          <a:p>
+            <a:pPr marL="342900" indent="-342900">
+              <a:buAutoNum type="arabicPeriod"/>
+            </a:pPr>
+            <a:r>
+              <a:rPr lang="en-US" sz="1600" dirty="0">
+                <a:latin typeface="Asap"/>
+                <a:ea typeface="Asap"/>
+                <a:cs typeface="Asap"/>
+                <a:sym typeface="Asap"/>
+              </a:rPr>
+              <a:t>Saran </a:t>
+            </a:r>
+            <a:r>
+              <a:rPr lang="en-US" sz="1600" dirty="0" err="1">
+                <a:latin typeface="Asap"/>
+                <a:ea typeface="Asap"/>
+                <a:cs typeface="Asap"/>
+                <a:sym typeface="Asap"/>
+              </a:rPr>
+              <a:t>dari</a:t>
+            </a:r>
+            <a:r>
+              <a:rPr lang="en-US" sz="1600" dirty="0">
+                <a:latin typeface="Asap"/>
+                <a:ea typeface="Asap"/>
+                <a:cs typeface="Asap"/>
+                <a:sym typeface="Asap"/>
+              </a:rPr>
+              <a:t> </a:t>
+            </a:r>
+            <a:r>
+              <a:rPr lang="en-US" sz="1600" dirty="0" err="1">
+                <a:latin typeface="Asap"/>
+                <a:ea typeface="Asap"/>
+                <a:cs typeface="Asap"/>
+                <a:sym typeface="Asap"/>
+              </a:rPr>
+              <a:t>saya</a:t>
+            </a:r>
+            <a:r>
+              <a:rPr lang="en-US" sz="1600" dirty="0">
+                <a:latin typeface="Asap"/>
+                <a:ea typeface="Asap"/>
+                <a:cs typeface="Asap"/>
+                <a:sym typeface="Asap"/>
+              </a:rPr>
+              <a:t> </a:t>
+            </a:r>
+            <a:r>
+              <a:rPr lang="en-US" sz="1600" dirty="0" err="1">
+                <a:latin typeface="Asap"/>
+                <a:ea typeface="Asap"/>
+                <a:cs typeface="Asap"/>
+                <a:sym typeface="Asap"/>
+              </a:rPr>
+              <a:t>untuk</a:t>
+            </a:r>
+            <a:r>
+              <a:rPr lang="en-US" sz="1600" dirty="0">
+                <a:latin typeface="Asap"/>
+                <a:ea typeface="Asap"/>
+                <a:cs typeface="Asap"/>
+                <a:sym typeface="Asap"/>
+              </a:rPr>
+              <a:t> </a:t>
+            </a:r>
+            <a:r>
+              <a:rPr lang="en-US" sz="1600" dirty="0" err="1">
+                <a:latin typeface="Asap"/>
+                <a:ea typeface="Asap"/>
+                <a:cs typeface="Asap"/>
+                <a:sym typeface="Asap"/>
+              </a:rPr>
+              <a:t>perusahaan</a:t>
+            </a:r>
+            <a:r>
+              <a:rPr lang="en-US" sz="1600" dirty="0">
+                <a:latin typeface="Asap"/>
+                <a:ea typeface="Asap"/>
+                <a:cs typeface="Asap"/>
+                <a:sym typeface="Asap"/>
+              </a:rPr>
+              <a:t> </a:t>
+            </a:r>
+            <a:r>
+              <a:rPr lang="en-US" sz="1600" dirty="0" err="1">
+                <a:latin typeface="Asap"/>
+                <a:ea typeface="Asap"/>
+                <a:cs typeface="Asap"/>
+                <a:sym typeface="Asap"/>
+              </a:rPr>
+              <a:t>bisa</a:t>
+            </a:r>
+            <a:r>
+              <a:rPr lang="en-US" sz="1600" dirty="0">
+                <a:latin typeface="Asap"/>
+                <a:ea typeface="Asap"/>
+                <a:cs typeface="Asap"/>
+                <a:sym typeface="Asap"/>
+              </a:rPr>
+              <a:t> </a:t>
+            </a:r>
+            <a:r>
+              <a:rPr lang="en-US" sz="1600" dirty="0" err="1">
+                <a:latin typeface="Asap"/>
+                <a:ea typeface="Asap"/>
+                <a:cs typeface="Asap"/>
+                <a:sym typeface="Asap"/>
+              </a:rPr>
+              <a:t>mempertimbangkan</a:t>
+            </a:r>
+            <a:r>
+              <a:rPr lang="en-US" sz="1600" dirty="0">
+                <a:latin typeface="Asap"/>
+                <a:ea typeface="Asap"/>
+                <a:cs typeface="Asap"/>
+                <a:sym typeface="Asap"/>
+              </a:rPr>
+              <a:t> </a:t>
+            </a:r>
+            <a:r>
+              <a:rPr lang="en-US" sz="1600" dirty="0" err="1">
+                <a:latin typeface="Asap"/>
+                <a:ea typeface="Asap"/>
+                <a:cs typeface="Asap"/>
+                <a:sym typeface="Asap"/>
+              </a:rPr>
+              <a:t>untuk</a:t>
+            </a:r>
+            <a:r>
+              <a:rPr lang="en-US" sz="1600" dirty="0">
+                <a:latin typeface="Asap"/>
+                <a:ea typeface="Asap"/>
+                <a:cs typeface="Asap"/>
+                <a:sym typeface="Asap"/>
+              </a:rPr>
+              <a:t> </a:t>
+            </a:r>
+            <a:r>
+              <a:rPr lang="en-US" sz="1600" dirty="0" err="1">
+                <a:latin typeface="Asap"/>
+                <a:ea typeface="Asap"/>
+                <a:cs typeface="Asap"/>
+                <a:sym typeface="Asap"/>
+              </a:rPr>
+              <a:t>penerapan</a:t>
+            </a:r>
+            <a:r>
+              <a:rPr lang="en-US" sz="1600" dirty="0">
+                <a:latin typeface="Asap"/>
+                <a:ea typeface="Asap"/>
+                <a:cs typeface="Asap"/>
+                <a:sym typeface="Asap"/>
+              </a:rPr>
+              <a:t> </a:t>
+            </a:r>
+            <a:r>
+              <a:rPr lang="en-US" sz="1600" dirty="0" err="1">
+                <a:latin typeface="Asap"/>
+                <a:ea typeface="Asap"/>
+                <a:cs typeface="Asap"/>
+                <a:sym typeface="Asap"/>
+              </a:rPr>
+              <a:t>kriteria</a:t>
+            </a:r>
+            <a:r>
+              <a:rPr lang="en-US" sz="1600" dirty="0">
+                <a:latin typeface="Asap"/>
+                <a:ea typeface="Asap"/>
+                <a:cs typeface="Asap"/>
+                <a:sym typeface="Asap"/>
+              </a:rPr>
+              <a:t> </a:t>
+            </a:r>
+            <a:r>
+              <a:rPr lang="en-US" sz="1600" dirty="0" err="1">
+                <a:latin typeface="Asap"/>
+                <a:ea typeface="Asap"/>
+                <a:cs typeface="Asap"/>
+                <a:sym typeface="Asap"/>
+              </a:rPr>
+              <a:t>verifikasi</a:t>
+            </a:r>
+            <a:r>
+              <a:rPr lang="en-US" sz="1600" dirty="0">
+                <a:latin typeface="Asap"/>
+                <a:ea typeface="Asap"/>
+                <a:cs typeface="Asap"/>
+                <a:sym typeface="Asap"/>
+              </a:rPr>
+              <a:t> </a:t>
+            </a:r>
+            <a:r>
+              <a:rPr lang="en-US" sz="1600" dirty="0" err="1">
+                <a:latin typeface="Asap"/>
+                <a:ea typeface="Asap"/>
+                <a:cs typeface="Asap"/>
+                <a:sym typeface="Asap"/>
+              </a:rPr>
+              <a:t>pengajuan</a:t>
+            </a:r>
+            <a:r>
+              <a:rPr lang="en-US" sz="1600" dirty="0">
+                <a:latin typeface="Asap"/>
+                <a:ea typeface="Asap"/>
+                <a:cs typeface="Asap"/>
+                <a:sym typeface="Asap"/>
+              </a:rPr>
+              <a:t> </a:t>
+            </a:r>
+            <a:r>
+              <a:rPr lang="en-US" sz="1600" dirty="0" err="1">
+                <a:latin typeface="Asap"/>
+                <a:ea typeface="Asap"/>
+                <a:cs typeface="Asap"/>
+                <a:sym typeface="Asap"/>
+              </a:rPr>
+              <a:t>kredit</a:t>
+            </a:r>
+            <a:r>
+              <a:rPr lang="en-US" sz="1600" dirty="0">
+                <a:latin typeface="Asap"/>
+                <a:ea typeface="Asap"/>
+                <a:cs typeface="Asap"/>
+                <a:sym typeface="Asap"/>
+              </a:rPr>
+              <a:t> yang </a:t>
+            </a:r>
+            <a:r>
+              <a:rPr lang="en-US" sz="1600" dirty="0" err="1">
+                <a:latin typeface="Asap"/>
+                <a:ea typeface="Asap"/>
+                <a:cs typeface="Asap"/>
+                <a:sym typeface="Asap"/>
+              </a:rPr>
+              <a:t>lebih</a:t>
+            </a:r>
+            <a:r>
+              <a:rPr lang="en-US" sz="1600" dirty="0">
+                <a:latin typeface="Asap"/>
+                <a:ea typeface="Asap"/>
+                <a:cs typeface="Asap"/>
+                <a:sym typeface="Asap"/>
+              </a:rPr>
+              <a:t> </a:t>
+            </a:r>
+            <a:r>
+              <a:rPr lang="en-US" sz="1600" dirty="0" err="1">
+                <a:latin typeface="Asap"/>
+                <a:ea typeface="Asap"/>
+                <a:cs typeface="Asap"/>
+                <a:sym typeface="Asap"/>
+              </a:rPr>
+              <a:t>ketat</a:t>
+            </a:r>
+            <a:r>
+              <a:rPr lang="en-US" sz="1600" dirty="0">
+                <a:latin typeface="Asap"/>
+                <a:ea typeface="Asap"/>
+                <a:cs typeface="Asap"/>
+                <a:sym typeface="Asap"/>
+              </a:rPr>
+              <a:t> </a:t>
+            </a:r>
+            <a:r>
+              <a:rPr lang="en-US" sz="1600" dirty="0" err="1">
+                <a:latin typeface="Asap"/>
+                <a:ea typeface="Asap"/>
+                <a:cs typeface="Asap"/>
+                <a:sym typeface="Asap"/>
+              </a:rPr>
+              <a:t>untuk</a:t>
+            </a:r>
+            <a:r>
+              <a:rPr lang="en-US" sz="1600" dirty="0">
+                <a:latin typeface="Asap"/>
+                <a:ea typeface="Asap"/>
+                <a:cs typeface="Asap"/>
+                <a:sym typeface="Asap"/>
+              </a:rPr>
+              <a:t> </a:t>
+            </a:r>
+            <a:r>
+              <a:rPr lang="en-US" sz="1600" dirty="0" err="1">
+                <a:latin typeface="Asap"/>
+                <a:ea typeface="Asap"/>
+                <a:cs typeface="Asap"/>
+                <a:sym typeface="Asap"/>
+              </a:rPr>
+              <a:t>laki-laki</a:t>
+            </a:r>
+            <a:r>
+              <a:rPr lang="en-US" sz="1600" dirty="0">
+                <a:latin typeface="Asap"/>
+                <a:ea typeface="Asap"/>
+                <a:cs typeface="Asap"/>
+                <a:sym typeface="Asap"/>
+              </a:rPr>
+              <a:t> </a:t>
+            </a:r>
+            <a:r>
+              <a:rPr lang="en-US" sz="1600" dirty="0" err="1">
+                <a:latin typeface="Asap"/>
+                <a:ea typeface="Asap"/>
+                <a:cs typeface="Asap"/>
+                <a:sym typeface="Asap"/>
+              </a:rPr>
+              <a:t>berdasarkan</a:t>
+            </a:r>
+            <a:r>
+              <a:rPr lang="en-US" sz="1600" dirty="0">
+                <a:latin typeface="Asap"/>
+                <a:ea typeface="Asap"/>
+                <a:cs typeface="Asap"/>
+                <a:sym typeface="Asap"/>
+              </a:rPr>
+              <a:t> </a:t>
+            </a:r>
+            <a:r>
+              <a:rPr lang="en-US" sz="1600" dirty="0" err="1">
+                <a:latin typeface="Asap"/>
+                <a:ea typeface="Asap"/>
+                <a:cs typeface="Asap"/>
+                <a:sym typeface="Asap"/>
+              </a:rPr>
+              <a:t>manajemen</a:t>
+            </a:r>
+            <a:r>
+              <a:rPr lang="en-US" sz="1600" dirty="0">
+                <a:latin typeface="Asap"/>
+                <a:ea typeface="Asap"/>
+                <a:cs typeface="Asap"/>
+                <a:sym typeface="Asap"/>
+              </a:rPr>
+              <a:t> </a:t>
+            </a:r>
+            <a:r>
+              <a:rPr lang="en-US" sz="1600" dirty="0" err="1">
+                <a:latin typeface="Asap"/>
+                <a:ea typeface="Asap"/>
+                <a:cs typeface="Asap"/>
+                <a:sym typeface="Asap"/>
+              </a:rPr>
+              <a:t>risiko</a:t>
+            </a:r>
+            <a:r>
+              <a:rPr lang="en-US" sz="1600" dirty="0">
+                <a:latin typeface="Asap"/>
+                <a:ea typeface="Asap"/>
+                <a:cs typeface="Asap"/>
+                <a:sym typeface="Asap"/>
+              </a:rPr>
+              <a:t> yang </a:t>
+            </a:r>
+            <a:r>
+              <a:rPr lang="en-US" sz="1600" dirty="0" err="1">
+                <a:latin typeface="Asap"/>
+                <a:ea typeface="Asap"/>
+                <a:cs typeface="Asap"/>
+                <a:sym typeface="Asap"/>
+              </a:rPr>
+              <a:t>baik</a:t>
+            </a:r>
+            <a:r>
+              <a:rPr lang="en-US" sz="1600" dirty="0">
+                <a:latin typeface="Asap"/>
+                <a:ea typeface="Asap"/>
+                <a:cs typeface="Asap"/>
+                <a:sym typeface="Asap"/>
+              </a:rPr>
+              <a:t>. </a:t>
+            </a:r>
+          </a:p>
+          <a:p>
+            <a:pPr marL="342900" indent="-342900">
+              <a:buAutoNum type="arabicPeriod"/>
+            </a:pPr>
+            <a:r>
+              <a:rPr lang="en-US" sz="1600" dirty="0">
+                <a:latin typeface="Asap"/>
+                <a:sym typeface="Asap"/>
+              </a:rPr>
+              <a:t>Bisa </a:t>
+            </a:r>
+            <a:r>
+              <a:rPr lang="en-US" sz="1600" dirty="0" err="1">
+                <a:latin typeface="Asap"/>
+                <a:sym typeface="Asap"/>
+              </a:rPr>
+              <a:t>diberikan</a:t>
+            </a:r>
+            <a:r>
+              <a:rPr lang="en-US" sz="1600" dirty="0">
+                <a:latin typeface="Asap"/>
+                <a:sym typeface="Asap"/>
+              </a:rPr>
+              <a:t> </a:t>
+            </a:r>
+            <a:r>
+              <a:rPr lang="en-US" sz="1600" dirty="0" err="1">
+                <a:latin typeface="Asap"/>
+                <a:sym typeface="Asap"/>
+              </a:rPr>
+              <a:t>rekomendasi</a:t>
+            </a:r>
+            <a:r>
+              <a:rPr lang="en-US" sz="1600" dirty="0">
+                <a:latin typeface="Asap"/>
+                <a:sym typeface="Asap"/>
+              </a:rPr>
+              <a:t> </a:t>
+            </a:r>
+            <a:r>
+              <a:rPr lang="en-US" sz="1600" dirty="0" err="1">
+                <a:latin typeface="Asap"/>
+                <a:sym typeface="Asap"/>
+              </a:rPr>
+              <a:t>untuk</a:t>
+            </a:r>
+            <a:r>
+              <a:rPr lang="en-US" sz="1600" dirty="0">
+                <a:latin typeface="Asap"/>
+                <a:sym typeface="Asap"/>
+              </a:rPr>
+              <a:t> </a:t>
+            </a:r>
+            <a:r>
+              <a:rPr lang="en-US" sz="1600" dirty="0" err="1">
+                <a:latin typeface="Asap"/>
+                <a:sym typeface="Asap"/>
+              </a:rPr>
+              <a:t>fokus</a:t>
+            </a:r>
+            <a:r>
+              <a:rPr lang="en-US" sz="1600" dirty="0">
+                <a:latin typeface="Asap"/>
+                <a:sym typeface="Asap"/>
+              </a:rPr>
+              <a:t> </a:t>
+            </a:r>
+            <a:r>
+              <a:rPr lang="en-US" sz="1600" dirty="0" err="1">
+                <a:latin typeface="Asap"/>
+                <a:sym typeface="Asap"/>
+              </a:rPr>
+              <a:t>pemasaran</a:t>
+            </a:r>
+            <a:r>
+              <a:rPr lang="en-US" sz="1600" dirty="0">
+                <a:latin typeface="Asap"/>
+                <a:sym typeface="Asap"/>
+              </a:rPr>
+              <a:t> </a:t>
+            </a:r>
+            <a:r>
+              <a:rPr lang="en-US" sz="1600" dirty="0" err="1">
+                <a:latin typeface="Asap"/>
+                <a:sym typeface="Asap"/>
+              </a:rPr>
+              <a:t>terhadap</a:t>
+            </a:r>
+            <a:r>
+              <a:rPr lang="en-US" sz="1600" dirty="0">
+                <a:latin typeface="Asap"/>
+                <a:sym typeface="Asap"/>
+              </a:rPr>
+              <a:t> </a:t>
+            </a:r>
+            <a:r>
+              <a:rPr lang="en-US" sz="1600" dirty="0" err="1">
+                <a:latin typeface="Asap"/>
+                <a:sym typeface="Asap"/>
+              </a:rPr>
+              <a:t>segmen</a:t>
+            </a:r>
+            <a:r>
+              <a:rPr lang="en-US" sz="1600" dirty="0">
+                <a:latin typeface="Asap"/>
+                <a:sym typeface="Asap"/>
+              </a:rPr>
+              <a:t> </a:t>
+            </a:r>
+            <a:r>
+              <a:rPr lang="en-US" sz="1600" dirty="0" err="1">
+                <a:latin typeface="Asap"/>
+                <a:sym typeface="Asap"/>
+              </a:rPr>
+              <a:t>perempuan</a:t>
+            </a:r>
+            <a:r>
+              <a:rPr lang="en-US" sz="1600" dirty="0">
+                <a:latin typeface="Asap"/>
+                <a:sym typeface="Asap"/>
+              </a:rPr>
+              <a:t>. </a:t>
+            </a:r>
+            <a:r>
+              <a:rPr lang="en-US" sz="1600" dirty="0" err="1">
+                <a:latin typeface="Asap"/>
+                <a:sym typeface="Asap"/>
+              </a:rPr>
+              <a:t>Berdasarkan</a:t>
+            </a:r>
+            <a:r>
+              <a:rPr lang="en-US" sz="1600" dirty="0">
+                <a:latin typeface="Asap"/>
+                <a:sym typeface="Asap"/>
+              </a:rPr>
+              <a:t> </a:t>
+            </a:r>
+            <a:r>
+              <a:rPr lang="en-US" sz="1600" dirty="0" err="1">
+                <a:latin typeface="Asap"/>
+                <a:sym typeface="Asap"/>
+              </a:rPr>
+              <a:t>statistik</a:t>
+            </a:r>
+            <a:r>
+              <a:rPr lang="en-US" sz="1600" dirty="0">
+                <a:latin typeface="Asap"/>
+                <a:sym typeface="Asap"/>
+              </a:rPr>
+              <a:t> </a:t>
+            </a:r>
+            <a:r>
+              <a:rPr lang="en-US" sz="1600" dirty="0" err="1">
+                <a:latin typeface="Asap"/>
+                <a:sym typeface="Asap"/>
+              </a:rPr>
+              <a:t>membuktikan</a:t>
+            </a:r>
+            <a:r>
+              <a:rPr lang="en-US" sz="1600" dirty="0">
+                <a:latin typeface="Asap"/>
+                <a:sym typeface="Asap"/>
+              </a:rPr>
+              <a:t> </a:t>
+            </a:r>
+            <a:r>
+              <a:rPr lang="en-US" sz="1600" dirty="0" err="1">
+                <a:latin typeface="Asap"/>
+                <a:sym typeface="Asap"/>
+              </a:rPr>
+              <a:t>kalau</a:t>
+            </a:r>
+            <a:r>
+              <a:rPr lang="en-US" sz="1600" dirty="0">
+                <a:latin typeface="Asap"/>
+                <a:sym typeface="Asap"/>
+              </a:rPr>
+              <a:t> </a:t>
+            </a:r>
+            <a:r>
+              <a:rPr lang="en-US" sz="1600" dirty="0" err="1">
+                <a:latin typeface="Asap"/>
+                <a:sym typeface="Asap"/>
+              </a:rPr>
+              <a:t>nasabah</a:t>
+            </a:r>
+            <a:r>
+              <a:rPr lang="en-US" sz="1600" dirty="0">
+                <a:latin typeface="Asap"/>
+                <a:sym typeface="Asap"/>
+              </a:rPr>
+              <a:t> </a:t>
+            </a:r>
+            <a:r>
+              <a:rPr lang="en-US" sz="1600" dirty="0" err="1">
+                <a:latin typeface="Asap"/>
+                <a:sym typeface="Asap"/>
+              </a:rPr>
+              <a:t>perempuan</a:t>
+            </a:r>
+            <a:r>
+              <a:rPr lang="en-US" sz="1600" dirty="0">
+                <a:latin typeface="Asap"/>
+                <a:sym typeface="Asap"/>
+              </a:rPr>
+              <a:t> </a:t>
+            </a:r>
+            <a:r>
+              <a:rPr lang="en-US" sz="1600" dirty="0" err="1">
+                <a:latin typeface="Asap"/>
+                <a:sym typeface="Asap"/>
+              </a:rPr>
+              <a:t>lebih</a:t>
+            </a:r>
+            <a:r>
+              <a:rPr lang="en-US" sz="1600" dirty="0">
+                <a:latin typeface="Asap"/>
+                <a:sym typeface="Asap"/>
+              </a:rPr>
+              <a:t> </a:t>
+            </a:r>
+            <a:r>
+              <a:rPr lang="en-US" sz="1600" dirty="0" err="1">
+                <a:latin typeface="Asap"/>
+                <a:sym typeface="Asap"/>
+              </a:rPr>
+              <a:t>patuh</a:t>
+            </a:r>
+            <a:r>
+              <a:rPr lang="en-US" sz="1600" dirty="0">
+                <a:latin typeface="Asap"/>
+                <a:sym typeface="Asap"/>
+              </a:rPr>
+              <a:t> </a:t>
+            </a:r>
+            <a:r>
+              <a:rPr lang="en-US" sz="1600" dirty="0" err="1">
+                <a:latin typeface="Asap"/>
+                <a:sym typeface="Asap"/>
+              </a:rPr>
+              <a:t>terhadap</a:t>
+            </a:r>
+            <a:r>
+              <a:rPr lang="en-US" sz="1600" dirty="0">
+                <a:latin typeface="Asap"/>
+                <a:sym typeface="Asap"/>
+              </a:rPr>
+              <a:t> </a:t>
+            </a:r>
+            <a:r>
+              <a:rPr lang="en-US" sz="1600" dirty="0" err="1">
+                <a:latin typeface="Asap"/>
+                <a:sym typeface="Asap"/>
+              </a:rPr>
+              <a:t>manajemen</a:t>
+            </a:r>
+            <a:r>
+              <a:rPr lang="en-US" sz="1600" dirty="0">
+                <a:latin typeface="Asap"/>
+                <a:sym typeface="Asap"/>
+              </a:rPr>
+              <a:t> </a:t>
+            </a:r>
+            <a:r>
+              <a:rPr lang="en-US" sz="1600" dirty="0" err="1">
+                <a:latin typeface="Asap"/>
+                <a:sym typeface="Asap"/>
+              </a:rPr>
+              <a:t>risiko</a:t>
+            </a:r>
+            <a:r>
+              <a:rPr lang="en-US" sz="1600" dirty="0">
+                <a:latin typeface="Asap"/>
+                <a:sym typeface="Asap"/>
+              </a:rPr>
+              <a:t>.</a:t>
+            </a:r>
+            <a:endParaRPr lang="en-ID" sz="1600" dirty="0"/>
+          </a:p>
+          <a:p>
+            <a:pPr marL="0" lvl="0" indent="0" algn="l"/>
+            <a:endParaRPr lang="en-US" sz="1600" dirty="0">
+              <a:latin typeface="Asap"/>
+              <a:ea typeface="Asap"/>
+              <a:cs typeface="Asap"/>
+              <a:sym typeface="Asap"/>
+            </a:endParaRPr>
+          </a:p>
+        </p:txBody>
+      </p:sp>
+      <p:pic>
+        <p:nvPicPr>
+          <p:cNvPr id="3" name="Picture 2">
+            <a:extLst>
+              <a:ext uri="{FF2B5EF4-FFF2-40B4-BE49-F238E27FC236}">
+                <a16:creationId xmlns:a16="http://schemas.microsoft.com/office/drawing/2014/main" id="{4CFCE2D4-9C88-C748-C817-5D52BC96237F}"/>
+              </a:ext>
+            </a:extLst>
+          </p:cNvPr>
+          <p:cNvPicPr>
+            <a:picLocks noChangeAspect="1"/>
+          </p:cNvPicPr>
+          <p:nvPr/>
+        </p:nvPicPr>
+        <p:blipFill>
+          <a:blip r:embed="rId3">
+            <a:extLst>
+              <a:ext uri="{28A0092B-C50C-407E-A947-70E740481C1C}">
+                <a14:useLocalDpi xmlns:a14="http://schemas.microsoft.com/office/drawing/2010/main" val="0"/>
+              </a:ext>
+            </a:extLst>
+          </a:blip>
+          <a:stretch>
+            <a:fillRect/>
+          </a:stretch>
+        </p:blipFill>
+        <p:spPr>
+          <a:xfrm>
+            <a:off x="6330462" y="1526447"/>
+            <a:ext cx="5683162" cy="3805105"/>
+          </a:xfrm>
+          <a:prstGeom prst="rect">
+            <a:avLst/>
+          </a:prstGeom>
+        </p:spPr>
+      </p:pic>
+    </p:spTree>
+    <p:extLst>
+      <p:ext uri="{BB962C8B-B14F-4D97-AF65-F5344CB8AC3E}">
+        <p14:creationId xmlns:p14="http://schemas.microsoft.com/office/powerpoint/2010/main" val="1977837249"/>
+      </p:ext>
+    </p:extLst>
+  </p:cSld>
+  <p:clrMapOvr>
+    <a:masterClrMapping/>
+  </p:clrMapOvr>
+</p:sld>
+</file>
+
+<file path=ppt/slides/slide8.xml><?xml version="1.0" encoding="utf-8"?>
+<p:sld xmlns:a="http://schemas.openxmlformats.org/drawingml/2006/main" xmlns:r="http://schemas.openxmlformats.org/officeDocument/2006/relationships" xmlns:p="http://schemas.openxmlformats.org/presentationml/2006/main">
+  <p:cSld>
+    <p:spTree>
+      <p:nvGrpSpPr>
+        <p:cNvPr id="1" name="">
+          <a:extLst>
+            <a:ext uri="{FF2B5EF4-FFF2-40B4-BE49-F238E27FC236}">
+              <a16:creationId xmlns:a16="http://schemas.microsoft.com/office/drawing/2014/main" id="{94FECFF5-230B-C3B5-B2DB-136B5CCDC109}"/>
+            </a:ext>
+          </a:extLst>
+        </p:cNvPr>
+        <p:cNvGrpSpPr/>
+        <p:nvPr/>
+      </p:nvGrpSpPr>
+      <p:grpSpPr>
+        <a:xfrm>
+          <a:off x="0" y="0"/>
+          <a:ext cx="0" cy="0"/>
+          <a:chOff x="0" y="0"/>
+          <a:chExt cx="0" cy="0"/>
+        </a:xfrm>
+      </p:grpSpPr>
+      <p:pic>
+        <p:nvPicPr>
+          <p:cNvPr id="4" name="object 4">
+            <a:extLst>
+              <a:ext uri="{FF2B5EF4-FFF2-40B4-BE49-F238E27FC236}">
+                <a16:creationId xmlns:a16="http://schemas.microsoft.com/office/drawing/2014/main" id="{DBFD9D19-1FBF-3F0D-1858-967004FC91A9}"/>
+              </a:ext>
+            </a:extLst>
+          </p:cNvPr>
+          <p:cNvPicPr/>
+          <p:nvPr/>
+        </p:nvPicPr>
+        <p:blipFill>
+          <a:blip r:embed="rId2" cstate="print"/>
+          <a:stretch>
+            <a:fillRect/>
+          </a:stretch>
+        </p:blipFill>
+        <p:spPr>
+          <a:xfrm>
+            <a:off x="10714044" y="466932"/>
+            <a:ext cx="943197" cy="707397"/>
+          </a:xfrm>
+          <a:prstGeom prst="rect">
+            <a:avLst/>
+          </a:prstGeom>
+        </p:spPr>
+      </p:pic>
+      <p:sp>
+        <p:nvSpPr>
+          <p:cNvPr id="6" name="TextBox 13">
+            <a:extLst>
+              <a:ext uri="{FF2B5EF4-FFF2-40B4-BE49-F238E27FC236}">
+                <a16:creationId xmlns:a16="http://schemas.microsoft.com/office/drawing/2014/main" id="{D493A197-C774-76F4-D9A3-D9808283A9C5}"/>
+              </a:ext>
+            </a:extLst>
+          </p:cNvPr>
+          <p:cNvSpPr txBox="1"/>
+          <p:nvPr/>
+        </p:nvSpPr>
+        <p:spPr>
+          <a:xfrm>
+            <a:off x="534759" y="1156079"/>
+            <a:ext cx="5683161" cy="984885"/>
+          </a:xfrm>
+          <a:prstGeom prst="rect">
+            <a:avLst/>
+          </a:prstGeom>
+        </p:spPr>
+        <p:txBody>
+          <a:bodyPr wrap="square" lIns="0" tIns="0" rIns="0" bIns="0" rtlCol="0" anchor="t">
+            <a:spAutoFit/>
+          </a:bodyPr>
+          <a:lstStyle/>
+          <a:p>
+            <a:pPr lvl="0"/>
+            <a:r>
+              <a:rPr lang="en-US" sz="3200" b="1" dirty="0">
+                <a:latin typeface="Noto Serif Bengali SemiCondensed Heavy"/>
+                <a:ea typeface="Noto Serif Bengali SemiCondensed Heavy"/>
+                <a:cs typeface="Noto Serif Bengali SemiCondensed Heavy"/>
+                <a:sym typeface="Noto Serif Bengali SemiCondensed Heavy"/>
+              </a:rPr>
+              <a:t>Hasil </a:t>
+            </a:r>
+            <a:r>
+              <a:rPr lang="en-US" sz="3200" b="1" dirty="0" err="1">
+                <a:latin typeface="Noto Serif Bengali SemiCondensed Heavy"/>
+                <a:ea typeface="Noto Serif Bengali SemiCondensed Heavy"/>
+                <a:cs typeface="Noto Serif Bengali SemiCondensed Heavy"/>
+                <a:sym typeface="Noto Serif Bengali SemiCondensed Heavy"/>
+              </a:rPr>
+              <a:t>Analisis</a:t>
+            </a:r>
+            <a:r>
+              <a:rPr lang="en-US" sz="3200" b="1" dirty="0">
+                <a:latin typeface="Noto Serif Bengali SemiCondensed Heavy"/>
+                <a:ea typeface="Noto Serif Bengali SemiCondensed Heavy"/>
+                <a:cs typeface="Noto Serif Bengali SemiCondensed Heavy"/>
+                <a:sym typeface="Noto Serif Bengali SemiCondensed Heavy"/>
+              </a:rPr>
+              <a:t> </a:t>
+            </a:r>
+            <a:r>
+              <a:rPr lang="da-DK" sz="3200" b="1" dirty="0">
+                <a:latin typeface="Noto Serif Bengali SemiCondensed Heavy"/>
+                <a:ea typeface="Noto Serif Bengali SemiCondensed Heavy"/>
+                <a:cs typeface="Noto Serif Bengali SemiCondensed Heavy"/>
+                <a:sym typeface="Noto Serif Bengali SemiCondensed Heavy"/>
+              </a:rPr>
+              <a:t>Rasio Kredit VS Risiko Gagal Bayar</a:t>
+            </a:r>
+            <a:endParaRPr lang="en-US" sz="3200" b="1" dirty="0">
+              <a:latin typeface="Noto Serif Bengali SemiCondensed Heavy"/>
+              <a:ea typeface="Noto Serif Bengali SemiCondensed Heavy"/>
+              <a:cs typeface="Noto Serif Bengali SemiCondensed Heavy"/>
+              <a:sym typeface="Noto Serif Bengali SemiCondensed Heavy"/>
+            </a:endParaRPr>
+          </a:p>
+        </p:txBody>
+      </p:sp>
+      <p:sp>
+        <p:nvSpPr>
+          <p:cNvPr id="7" name="TextBox 14">
+            <a:extLst>
+              <a:ext uri="{FF2B5EF4-FFF2-40B4-BE49-F238E27FC236}">
+                <a16:creationId xmlns:a16="http://schemas.microsoft.com/office/drawing/2014/main" id="{766BCD8A-A95A-23ED-A193-D324C6941FF9}"/>
+              </a:ext>
+            </a:extLst>
+          </p:cNvPr>
+          <p:cNvSpPr txBox="1"/>
+          <p:nvPr/>
+        </p:nvSpPr>
+        <p:spPr>
+          <a:xfrm>
+            <a:off x="534759" y="2241021"/>
+            <a:ext cx="5683161" cy="1723549"/>
+          </a:xfrm>
+          <a:prstGeom prst="rect">
+            <a:avLst/>
+          </a:prstGeom>
+        </p:spPr>
+        <p:txBody>
+          <a:bodyPr wrap="square" lIns="0" tIns="0" rIns="0" bIns="0" rtlCol="0" anchor="t">
+            <a:spAutoFit/>
+          </a:bodyPr>
+          <a:lstStyle/>
+          <a:p>
+            <a:r>
+              <a:rPr lang="en-US" sz="1600" dirty="0" err="1">
+                <a:latin typeface="Asap"/>
+                <a:ea typeface="Asap"/>
+                <a:cs typeface="Asap"/>
+                <a:sym typeface="Asap"/>
+              </a:rPr>
+              <a:t>Berdasarkan</a:t>
+            </a:r>
+            <a:r>
+              <a:rPr lang="en-US" sz="1600" dirty="0">
+                <a:latin typeface="Asap"/>
+                <a:ea typeface="Asap"/>
+                <a:cs typeface="Asap"/>
+                <a:sym typeface="Asap"/>
+              </a:rPr>
+              <a:t> </a:t>
+            </a:r>
+            <a:r>
+              <a:rPr lang="en-US" sz="1600" dirty="0" err="1">
+                <a:latin typeface="Asap"/>
+                <a:ea typeface="Asap"/>
+                <a:cs typeface="Asap"/>
+                <a:sym typeface="Asap"/>
+              </a:rPr>
+              <a:t>hasil</a:t>
+            </a:r>
+            <a:r>
+              <a:rPr lang="en-US" sz="1600" dirty="0">
+                <a:latin typeface="Asap"/>
+                <a:ea typeface="Asap"/>
+                <a:cs typeface="Asap"/>
+                <a:sym typeface="Asap"/>
+              </a:rPr>
+              <a:t> </a:t>
+            </a:r>
+            <a:r>
+              <a:rPr lang="en-US" sz="1600" dirty="0" err="1">
+                <a:latin typeface="Asap"/>
+                <a:ea typeface="Asap"/>
+                <a:cs typeface="Asap"/>
+                <a:sym typeface="Asap"/>
+              </a:rPr>
+              <a:t>analisis</a:t>
+            </a:r>
+            <a:r>
+              <a:rPr lang="en-US" sz="1600" dirty="0">
+                <a:latin typeface="Asap"/>
+                <a:ea typeface="Asap"/>
+                <a:cs typeface="Asap"/>
+                <a:sym typeface="Asap"/>
+              </a:rPr>
+              <a:t> </a:t>
+            </a:r>
+            <a:r>
+              <a:rPr lang="en-US" sz="1600" dirty="0" err="1">
+                <a:latin typeface="Asap"/>
+                <a:ea typeface="Asap"/>
+                <a:cs typeface="Asap"/>
+                <a:sym typeface="Asap"/>
+              </a:rPr>
+              <a:t>distribusi</a:t>
+            </a:r>
+            <a:r>
+              <a:rPr lang="en-US" sz="1600" dirty="0">
+                <a:latin typeface="Asap"/>
+                <a:ea typeface="Asap"/>
+                <a:cs typeface="Asap"/>
+                <a:sym typeface="Asap"/>
+              </a:rPr>
+              <a:t> </a:t>
+            </a:r>
+            <a:r>
+              <a:rPr lang="en-US" sz="1600" dirty="0" err="1">
+                <a:latin typeface="Asap"/>
+                <a:ea typeface="Asap"/>
+                <a:cs typeface="Asap"/>
+                <a:sym typeface="Asap"/>
+              </a:rPr>
+              <a:t>rasio</a:t>
+            </a:r>
+            <a:r>
+              <a:rPr lang="en-US" sz="1600" dirty="0">
+                <a:latin typeface="Asap"/>
+                <a:ea typeface="Asap"/>
+                <a:cs typeface="Asap"/>
+                <a:sym typeface="Asap"/>
+              </a:rPr>
+              <a:t> </a:t>
+            </a:r>
+            <a:r>
+              <a:rPr lang="en-US" sz="1600" dirty="0" err="1">
+                <a:latin typeface="Asap"/>
+                <a:ea typeface="Asap"/>
+                <a:cs typeface="Asap"/>
+                <a:sym typeface="Asap"/>
+              </a:rPr>
+              <a:t>kredit</a:t>
+            </a:r>
+            <a:r>
+              <a:rPr lang="en-US" sz="1600" dirty="0">
+                <a:latin typeface="Asap"/>
+                <a:ea typeface="Asap"/>
+                <a:cs typeface="Asap"/>
+                <a:sym typeface="Asap"/>
+              </a:rPr>
+              <a:t> vs </a:t>
+            </a:r>
+            <a:r>
+              <a:rPr lang="en-US" sz="1600" dirty="0" err="1">
+                <a:latin typeface="Asap"/>
+                <a:ea typeface="Asap"/>
+                <a:cs typeface="Asap"/>
+                <a:sym typeface="Asap"/>
+              </a:rPr>
+              <a:t>risiko</a:t>
+            </a:r>
+            <a:r>
+              <a:rPr lang="en-US" sz="1600" dirty="0">
+                <a:latin typeface="Asap"/>
+                <a:ea typeface="Asap"/>
+                <a:cs typeface="Asap"/>
+                <a:sym typeface="Asap"/>
+              </a:rPr>
+              <a:t> </a:t>
+            </a:r>
+            <a:r>
+              <a:rPr lang="en-US" sz="1600" dirty="0" err="1">
+                <a:latin typeface="Asap"/>
+                <a:ea typeface="Asap"/>
+                <a:cs typeface="Asap"/>
+                <a:sym typeface="Asap"/>
+              </a:rPr>
+              <a:t>gagal</a:t>
+            </a:r>
+            <a:r>
+              <a:rPr lang="en-US" sz="1600" dirty="0">
+                <a:latin typeface="Asap"/>
+                <a:ea typeface="Asap"/>
+                <a:cs typeface="Asap"/>
+                <a:sym typeface="Asap"/>
+              </a:rPr>
+              <a:t> </a:t>
+            </a:r>
+            <a:r>
+              <a:rPr lang="en-US" sz="1600" dirty="0" err="1">
+                <a:latin typeface="Asap"/>
+                <a:ea typeface="Asap"/>
+                <a:cs typeface="Asap"/>
+                <a:sym typeface="Asap"/>
+              </a:rPr>
+              <a:t>bayar</a:t>
+            </a:r>
+            <a:r>
+              <a:rPr lang="en-US" sz="1600" dirty="0">
+                <a:latin typeface="Asap"/>
+                <a:ea typeface="Asap"/>
+                <a:cs typeface="Asap"/>
+                <a:sym typeface="Asap"/>
+              </a:rPr>
+              <a:t>, </a:t>
+            </a:r>
+            <a:r>
+              <a:rPr lang="en-US" sz="1600" dirty="0" err="1">
+                <a:latin typeface="Asap"/>
+                <a:ea typeface="Asap"/>
+                <a:cs typeface="Asap"/>
+                <a:sym typeface="Asap"/>
+              </a:rPr>
+              <a:t>didapatkan</a:t>
+            </a:r>
+            <a:r>
+              <a:rPr lang="en-US" sz="1600" dirty="0">
+                <a:latin typeface="Asap"/>
+                <a:ea typeface="Asap"/>
+                <a:cs typeface="Asap"/>
+                <a:sym typeface="Asap"/>
+              </a:rPr>
+              <a:t> insight </a:t>
+            </a:r>
+            <a:r>
+              <a:rPr lang="en-US" sz="1600" dirty="0" err="1">
+                <a:latin typeface="Asap"/>
+                <a:ea typeface="Asap"/>
+                <a:cs typeface="Asap"/>
+                <a:sym typeface="Asap"/>
+              </a:rPr>
+              <a:t>yaitu</a:t>
+            </a:r>
+            <a:r>
+              <a:rPr lang="en-US" sz="1600" dirty="0">
+                <a:latin typeface="Asap"/>
+                <a:ea typeface="Asap"/>
+                <a:cs typeface="Asap"/>
+                <a:sym typeface="Asap"/>
+              </a:rPr>
+              <a:t> median </a:t>
+            </a:r>
+            <a:r>
+              <a:rPr lang="en-US" sz="1600" dirty="0" err="1">
+                <a:latin typeface="Asap"/>
+                <a:ea typeface="Asap"/>
+                <a:cs typeface="Asap"/>
+                <a:sym typeface="Asap"/>
+              </a:rPr>
+              <a:t>rasio</a:t>
+            </a:r>
+            <a:r>
+              <a:rPr lang="en-US" sz="1600" dirty="0">
+                <a:latin typeface="Asap"/>
+                <a:ea typeface="Asap"/>
+                <a:cs typeface="Asap"/>
+                <a:sym typeface="Asap"/>
+              </a:rPr>
+              <a:t> </a:t>
+            </a:r>
+            <a:r>
+              <a:rPr lang="en-US" sz="1600" dirty="0" err="1">
+                <a:latin typeface="Asap"/>
+                <a:ea typeface="Asap"/>
+                <a:cs typeface="Asap"/>
+                <a:sym typeface="Asap"/>
+              </a:rPr>
+              <a:t>untuk</a:t>
+            </a:r>
+            <a:r>
+              <a:rPr lang="en-US" sz="1600" dirty="0">
+                <a:latin typeface="Asap"/>
+                <a:ea typeface="Asap"/>
+                <a:cs typeface="Asap"/>
+                <a:sym typeface="Asap"/>
+              </a:rPr>
+              <a:t> </a:t>
+            </a:r>
+            <a:r>
+              <a:rPr lang="en-US" sz="1600" dirty="0" err="1">
+                <a:latin typeface="Asap"/>
+                <a:ea typeface="Asap"/>
+                <a:cs typeface="Asap"/>
+                <a:sym typeface="Asap"/>
+              </a:rPr>
+              <a:t>kedua</a:t>
+            </a:r>
+            <a:r>
+              <a:rPr lang="en-US" sz="1600" dirty="0">
+                <a:latin typeface="Asap"/>
+                <a:ea typeface="Asap"/>
+                <a:cs typeface="Asap"/>
+                <a:sym typeface="Asap"/>
+              </a:rPr>
+              <a:t> </a:t>
+            </a:r>
+            <a:r>
+              <a:rPr lang="en-US" sz="1600" dirty="0" err="1">
+                <a:latin typeface="Asap"/>
+                <a:ea typeface="Asap"/>
+                <a:cs typeface="Asap"/>
+                <a:sym typeface="Asap"/>
+              </a:rPr>
+              <a:t>kelompok</a:t>
+            </a:r>
+            <a:r>
+              <a:rPr lang="en-US" sz="1600" dirty="0">
+                <a:latin typeface="Asap"/>
+                <a:ea typeface="Asap"/>
+                <a:cs typeface="Asap"/>
+                <a:sym typeface="Asap"/>
+              </a:rPr>
+              <a:t> </a:t>
+            </a:r>
+            <a:r>
+              <a:rPr lang="en-US" sz="1600" dirty="0" err="1">
+                <a:latin typeface="Asap"/>
+                <a:ea typeface="Asap"/>
+                <a:cs typeface="Asap"/>
+                <a:sym typeface="Asap"/>
+              </a:rPr>
+              <a:t>itu</a:t>
+            </a:r>
+            <a:r>
+              <a:rPr lang="en-US" sz="1600" dirty="0">
+                <a:latin typeface="Asap"/>
+                <a:ea typeface="Asap"/>
+                <a:cs typeface="Asap"/>
+                <a:sym typeface="Asap"/>
+              </a:rPr>
+              <a:t> </a:t>
+            </a:r>
+            <a:r>
+              <a:rPr lang="en-US" sz="1600" dirty="0" err="1">
+                <a:latin typeface="Asap"/>
+                <a:ea typeface="Asap"/>
+                <a:cs typeface="Asap"/>
+                <a:sym typeface="Asap"/>
+              </a:rPr>
+              <a:t>ada</a:t>
+            </a:r>
+            <a:r>
+              <a:rPr lang="en-US" sz="1600" dirty="0">
+                <a:latin typeface="Asap"/>
+                <a:ea typeface="Asap"/>
+                <a:cs typeface="Asap"/>
+                <a:sym typeface="Asap"/>
+              </a:rPr>
+              <a:t> di </a:t>
+            </a:r>
+            <a:r>
+              <a:rPr lang="en-US" sz="1600" dirty="0" err="1">
+                <a:latin typeface="Asap"/>
+                <a:ea typeface="Asap"/>
+                <a:cs typeface="Asap"/>
+                <a:sym typeface="Asap"/>
+              </a:rPr>
+              <a:t>angka</a:t>
+            </a:r>
+            <a:r>
+              <a:rPr lang="en-US" sz="1600" dirty="0">
+                <a:latin typeface="Asap"/>
+                <a:ea typeface="Asap"/>
+                <a:cs typeface="Asap"/>
+                <a:sym typeface="Asap"/>
+              </a:rPr>
+              <a:t> 3 yang </a:t>
+            </a:r>
+            <a:r>
+              <a:rPr lang="en-US" sz="1600" dirty="0" err="1">
+                <a:latin typeface="Asap"/>
+                <a:ea typeface="Asap"/>
+                <a:cs typeface="Asap"/>
+                <a:sym typeface="Asap"/>
+              </a:rPr>
+              <a:t>artinya</a:t>
+            </a:r>
+            <a:r>
+              <a:rPr lang="en-US" sz="1600" dirty="0">
+                <a:latin typeface="Asap"/>
+                <a:ea typeface="Asap"/>
+                <a:cs typeface="Asap"/>
+                <a:sym typeface="Asap"/>
+              </a:rPr>
+              <a:t> </a:t>
+            </a:r>
+            <a:r>
+              <a:rPr lang="en-US" sz="1600" dirty="0" err="1">
+                <a:latin typeface="Asap"/>
+                <a:ea typeface="Asap"/>
+                <a:cs typeface="Asap"/>
+                <a:sym typeface="Asap"/>
+              </a:rPr>
+              <a:t>nasabah</a:t>
+            </a:r>
+            <a:r>
+              <a:rPr lang="en-US" sz="1600" dirty="0">
+                <a:latin typeface="Asap"/>
+                <a:ea typeface="Asap"/>
+                <a:cs typeface="Asap"/>
+                <a:sym typeface="Asap"/>
+              </a:rPr>
+              <a:t> </a:t>
+            </a:r>
+            <a:r>
+              <a:rPr lang="en-US" sz="1600" dirty="0" err="1">
+                <a:latin typeface="Asap"/>
+                <a:ea typeface="Asap"/>
+                <a:cs typeface="Asap"/>
+                <a:sym typeface="Asap"/>
+              </a:rPr>
+              <a:t>mengambil</a:t>
+            </a:r>
+            <a:r>
+              <a:rPr lang="en-US" sz="1600" dirty="0">
+                <a:latin typeface="Asap"/>
+                <a:ea typeface="Asap"/>
+                <a:cs typeface="Asap"/>
+                <a:sym typeface="Asap"/>
+              </a:rPr>
+              <a:t> </a:t>
+            </a:r>
+            <a:r>
+              <a:rPr lang="en-US" sz="1600" dirty="0" err="1">
+                <a:latin typeface="Asap"/>
+                <a:ea typeface="Asap"/>
+                <a:cs typeface="Asap"/>
+                <a:sym typeface="Asap"/>
+              </a:rPr>
+              <a:t>pinjaman</a:t>
+            </a:r>
+            <a:r>
+              <a:rPr lang="en-US" sz="1600" dirty="0">
+                <a:latin typeface="Asap"/>
+                <a:ea typeface="Asap"/>
+                <a:cs typeface="Asap"/>
+                <a:sym typeface="Asap"/>
+              </a:rPr>
+              <a:t> 3X </a:t>
+            </a:r>
+            <a:r>
+              <a:rPr lang="en-US" sz="1600" dirty="0" err="1">
+                <a:latin typeface="Asap"/>
+                <a:ea typeface="Asap"/>
+                <a:cs typeface="Asap"/>
+                <a:sym typeface="Asap"/>
+              </a:rPr>
+              <a:t>lebih</a:t>
+            </a:r>
+            <a:r>
+              <a:rPr lang="en-US" sz="1600" dirty="0">
+                <a:latin typeface="Asap"/>
+                <a:ea typeface="Asap"/>
+                <a:cs typeface="Asap"/>
+                <a:sym typeface="Asap"/>
+              </a:rPr>
+              <a:t> </a:t>
+            </a:r>
+            <a:r>
+              <a:rPr lang="en-US" sz="1600" dirty="0" err="1">
+                <a:latin typeface="Asap"/>
+                <a:ea typeface="Asap"/>
+                <a:cs typeface="Asap"/>
+                <a:sym typeface="Asap"/>
+              </a:rPr>
+              <a:t>besar</a:t>
+            </a:r>
+            <a:r>
+              <a:rPr lang="en-US" sz="1600" dirty="0">
+                <a:latin typeface="Asap"/>
+                <a:ea typeface="Asap"/>
+                <a:cs typeface="Asap"/>
+                <a:sym typeface="Asap"/>
+              </a:rPr>
+              <a:t> </a:t>
+            </a:r>
+            <a:r>
+              <a:rPr lang="en-US" sz="1600" dirty="0" err="1">
+                <a:latin typeface="Asap"/>
+                <a:ea typeface="Asap"/>
+                <a:cs typeface="Asap"/>
+                <a:sym typeface="Asap"/>
+              </a:rPr>
+              <a:t>dari</a:t>
+            </a:r>
+            <a:r>
+              <a:rPr lang="en-US" sz="1600" dirty="0">
+                <a:latin typeface="Asap"/>
+                <a:ea typeface="Asap"/>
+                <a:cs typeface="Asap"/>
+                <a:sym typeface="Asap"/>
+              </a:rPr>
+              <a:t> </a:t>
+            </a:r>
+            <a:r>
+              <a:rPr lang="en-US" sz="1600" dirty="0" err="1">
+                <a:latin typeface="Asap"/>
+                <a:ea typeface="Asap"/>
+                <a:cs typeface="Asap"/>
+                <a:sym typeface="Asap"/>
+              </a:rPr>
+              <a:t>pendapatan</a:t>
+            </a:r>
+            <a:r>
+              <a:rPr lang="en-US" sz="1600" dirty="0">
+                <a:latin typeface="Asap"/>
+                <a:ea typeface="Asap"/>
+                <a:cs typeface="Asap"/>
+                <a:sym typeface="Asap"/>
+              </a:rPr>
+              <a:t> </a:t>
+            </a:r>
+            <a:r>
+              <a:rPr lang="en-US" sz="1600" dirty="0" err="1">
+                <a:latin typeface="Asap"/>
+                <a:ea typeface="Asap"/>
+                <a:cs typeface="Asap"/>
+                <a:sym typeface="Asap"/>
+              </a:rPr>
+              <a:t>mereka</a:t>
+            </a:r>
+            <a:r>
+              <a:rPr lang="en-US" sz="1600" dirty="0">
+                <a:latin typeface="Asap"/>
+                <a:ea typeface="Asap"/>
+                <a:cs typeface="Asap"/>
+                <a:sym typeface="Asap"/>
+              </a:rPr>
+              <a:t>. Hal </a:t>
+            </a:r>
+            <a:r>
+              <a:rPr lang="en-US" sz="1600" dirty="0" err="1">
+                <a:latin typeface="Asap"/>
+                <a:ea typeface="Asap"/>
+                <a:cs typeface="Asap"/>
+                <a:sym typeface="Asap"/>
+              </a:rPr>
+              <a:t>tersebut</a:t>
+            </a:r>
+            <a:r>
+              <a:rPr lang="en-US" sz="1600" dirty="0">
+                <a:latin typeface="Asap"/>
+                <a:ea typeface="Asap"/>
+                <a:cs typeface="Asap"/>
+                <a:sym typeface="Asap"/>
+              </a:rPr>
+              <a:t> </a:t>
+            </a:r>
+            <a:r>
+              <a:rPr lang="en-US" sz="1600" dirty="0" err="1">
+                <a:latin typeface="Asap"/>
+                <a:ea typeface="Asap"/>
+                <a:cs typeface="Asap"/>
+                <a:sym typeface="Asap"/>
+              </a:rPr>
+              <a:t>tentunya</a:t>
+            </a:r>
+            <a:r>
+              <a:rPr lang="en-US" sz="1600" dirty="0">
+                <a:latin typeface="Asap"/>
+                <a:ea typeface="Asap"/>
+                <a:cs typeface="Asap"/>
+                <a:sym typeface="Asap"/>
+              </a:rPr>
+              <a:t> </a:t>
+            </a:r>
+            <a:r>
+              <a:rPr lang="en-US" sz="1600" dirty="0" err="1">
+                <a:latin typeface="Asap"/>
+                <a:ea typeface="Asap"/>
+                <a:cs typeface="Asap"/>
+                <a:sym typeface="Asap"/>
+              </a:rPr>
+              <a:t>bisa</a:t>
+            </a:r>
+            <a:r>
+              <a:rPr lang="en-US" sz="1600" dirty="0">
+                <a:latin typeface="Asap"/>
+                <a:ea typeface="Asap"/>
+                <a:cs typeface="Asap"/>
+                <a:sym typeface="Asap"/>
+              </a:rPr>
+              <a:t> </a:t>
+            </a:r>
+            <a:r>
+              <a:rPr lang="en-US" sz="1600" dirty="0" err="1">
+                <a:latin typeface="Asap"/>
+                <a:ea typeface="Asap"/>
+                <a:cs typeface="Asap"/>
+                <a:sym typeface="Asap"/>
+              </a:rPr>
+              <a:t>lebih</a:t>
+            </a:r>
+            <a:r>
+              <a:rPr lang="en-US" sz="1600" dirty="0">
+                <a:latin typeface="Asap"/>
+                <a:ea typeface="Asap"/>
+                <a:cs typeface="Asap"/>
+                <a:sym typeface="Asap"/>
+              </a:rPr>
+              <a:t> </a:t>
+            </a:r>
+            <a:r>
+              <a:rPr lang="en-US" sz="1600" dirty="0" err="1">
+                <a:latin typeface="Asap"/>
+                <a:ea typeface="Asap"/>
+                <a:cs typeface="Asap"/>
+                <a:sym typeface="Asap"/>
+              </a:rPr>
+              <a:t>diperhatikan</a:t>
+            </a:r>
+            <a:r>
+              <a:rPr lang="en-US" sz="1600" dirty="0">
+                <a:latin typeface="Asap"/>
+                <a:ea typeface="Asap"/>
+                <a:cs typeface="Asap"/>
+                <a:sym typeface="Asap"/>
+              </a:rPr>
+              <a:t> </a:t>
+            </a:r>
+            <a:r>
+              <a:rPr lang="en-US" sz="1600" dirty="0" err="1">
+                <a:latin typeface="Asap"/>
+                <a:ea typeface="Asap"/>
+                <a:cs typeface="Asap"/>
+                <a:sym typeface="Asap"/>
+              </a:rPr>
+              <a:t>risiko</a:t>
+            </a:r>
+            <a:r>
+              <a:rPr lang="en-US" sz="1600" dirty="0">
+                <a:latin typeface="Asap"/>
+                <a:ea typeface="Asap"/>
+                <a:cs typeface="Asap"/>
+                <a:sym typeface="Asap"/>
+              </a:rPr>
+              <a:t> </a:t>
+            </a:r>
+            <a:r>
+              <a:rPr lang="en-US" sz="1600" dirty="0" err="1">
+                <a:latin typeface="Asap"/>
+                <a:ea typeface="Asap"/>
+                <a:cs typeface="Asap"/>
+                <a:sym typeface="Asap"/>
+              </a:rPr>
+              <a:t>gagal</a:t>
+            </a:r>
+            <a:r>
+              <a:rPr lang="en-US" sz="1600" dirty="0">
+                <a:latin typeface="Asap"/>
+                <a:ea typeface="Asap"/>
+                <a:cs typeface="Asap"/>
+                <a:sym typeface="Asap"/>
+              </a:rPr>
+              <a:t> </a:t>
+            </a:r>
+            <a:r>
+              <a:rPr lang="en-US" sz="1600" dirty="0" err="1">
+                <a:latin typeface="Asap"/>
+                <a:ea typeface="Asap"/>
+                <a:cs typeface="Asap"/>
+                <a:sym typeface="Asap"/>
+              </a:rPr>
+              <a:t>bayar</a:t>
+            </a:r>
+            <a:r>
+              <a:rPr lang="en-US" sz="1600" dirty="0">
+                <a:latin typeface="Asap"/>
+                <a:ea typeface="Asap"/>
+                <a:cs typeface="Asap"/>
+                <a:sym typeface="Asap"/>
+              </a:rPr>
+              <a:t> </a:t>
+            </a:r>
+            <a:r>
+              <a:rPr lang="en-US" sz="1600" dirty="0" err="1">
+                <a:latin typeface="Asap"/>
+                <a:ea typeface="Asap"/>
+                <a:cs typeface="Asap"/>
+                <a:sym typeface="Asap"/>
+              </a:rPr>
+              <a:t>semakin</a:t>
+            </a:r>
+            <a:r>
+              <a:rPr lang="en-US" sz="1600" dirty="0">
+                <a:latin typeface="Asap"/>
+                <a:ea typeface="Asap"/>
+                <a:cs typeface="Asap"/>
+                <a:sym typeface="Asap"/>
+              </a:rPr>
+              <a:t> </a:t>
+            </a:r>
+            <a:r>
+              <a:rPr lang="en-US" sz="1600" dirty="0" err="1">
+                <a:latin typeface="Asap"/>
+                <a:ea typeface="Asap"/>
+                <a:cs typeface="Asap"/>
+                <a:sym typeface="Asap"/>
+              </a:rPr>
+              <a:t>besar</a:t>
+            </a:r>
+            <a:r>
+              <a:rPr lang="en-US" sz="1600" dirty="0">
+                <a:latin typeface="Asap"/>
+                <a:ea typeface="Asap"/>
+                <a:cs typeface="Asap"/>
+                <a:sym typeface="Asap"/>
+              </a:rPr>
+              <a:t> </a:t>
+            </a:r>
+            <a:r>
+              <a:rPr lang="en-US" sz="1600" dirty="0" err="1">
+                <a:latin typeface="Asap"/>
+                <a:ea typeface="Asap"/>
+                <a:cs typeface="Asap"/>
+                <a:sym typeface="Asap"/>
+              </a:rPr>
+              <a:t>jika</a:t>
+            </a:r>
+            <a:r>
+              <a:rPr lang="en-US" sz="1600" dirty="0">
+                <a:latin typeface="Asap"/>
+                <a:ea typeface="Asap"/>
+                <a:cs typeface="Asap"/>
+                <a:sym typeface="Asap"/>
+              </a:rPr>
+              <a:t> </a:t>
+            </a:r>
+            <a:r>
+              <a:rPr lang="en-US" sz="1600" dirty="0" err="1">
+                <a:latin typeface="Asap"/>
+                <a:ea typeface="Asap"/>
+                <a:cs typeface="Asap"/>
+                <a:sym typeface="Asap"/>
+              </a:rPr>
+              <a:t>hal</a:t>
+            </a:r>
+            <a:r>
+              <a:rPr lang="en-US" sz="1600" dirty="0">
+                <a:latin typeface="Asap"/>
+                <a:ea typeface="Asap"/>
+                <a:cs typeface="Asap"/>
+                <a:sym typeface="Asap"/>
+              </a:rPr>
+              <a:t> </a:t>
+            </a:r>
+            <a:r>
+              <a:rPr lang="en-US" sz="1600" dirty="0" err="1">
+                <a:latin typeface="Asap"/>
+                <a:ea typeface="Asap"/>
+                <a:cs typeface="Asap"/>
+                <a:sym typeface="Asap"/>
+              </a:rPr>
+              <a:t>ini</a:t>
+            </a:r>
+            <a:r>
+              <a:rPr lang="en-US" sz="1600" dirty="0">
+                <a:latin typeface="Asap"/>
+                <a:ea typeface="Asap"/>
+                <a:cs typeface="Asap"/>
+                <a:sym typeface="Asap"/>
+              </a:rPr>
+              <a:t> </a:t>
+            </a:r>
+            <a:r>
+              <a:rPr lang="en-US" sz="1600" dirty="0" err="1">
+                <a:latin typeface="Asap"/>
+                <a:ea typeface="Asap"/>
+                <a:cs typeface="Asap"/>
+                <a:sym typeface="Asap"/>
+              </a:rPr>
+              <a:t>terus</a:t>
+            </a:r>
+            <a:r>
+              <a:rPr lang="en-US" sz="1600" dirty="0">
+                <a:latin typeface="Asap"/>
+                <a:ea typeface="Asap"/>
+                <a:cs typeface="Asap"/>
+                <a:sym typeface="Asap"/>
+              </a:rPr>
+              <a:t> </a:t>
+            </a:r>
+            <a:r>
+              <a:rPr lang="en-US" sz="1600" dirty="0" err="1">
+                <a:latin typeface="Asap"/>
+                <a:ea typeface="Asap"/>
+                <a:cs typeface="Asap"/>
+                <a:sym typeface="Asap"/>
+              </a:rPr>
+              <a:t>dibiarkan</a:t>
+            </a:r>
+            <a:r>
+              <a:rPr lang="en-US" sz="1600" dirty="0">
+                <a:latin typeface="Asap"/>
+                <a:ea typeface="Asap"/>
+                <a:cs typeface="Asap"/>
+                <a:sym typeface="Asap"/>
+              </a:rPr>
+              <a:t>.</a:t>
+            </a:r>
+            <a:endParaRPr lang="en-ID" sz="1600" dirty="0"/>
+          </a:p>
+          <a:p>
+            <a:pPr marL="0" lvl="0" indent="0" algn="l"/>
+            <a:endParaRPr lang="en-US" sz="1600" dirty="0">
+              <a:latin typeface="Asap"/>
+              <a:ea typeface="Asap"/>
+              <a:cs typeface="Asap"/>
+              <a:sym typeface="Asap"/>
+            </a:endParaRPr>
+          </a:p>
+        </p:txBody>
+      </p:sp>
+      <p:sp>
+        <p:nvSpPr>
+          <p:cNvPr id="8" name="TextBox 13">
+            <a:extLst>
+              <a:ext uri="{FF2B5EF4-FFF2-40B4-BE49-F238E27FC236}">
+                <a16:creationId xmlns:a16="http://schemas.microsoft.com/office/drawing/2014/main" id="{0D2085D8-9311-1C3F-672B-6EE30830FA34}"/>
+              </a:ext>
+            </a:extLst>
+          </p:cNvPr>
+          <p:cNvSpPr txBox="1"/>
+          <p:nvPr/>
+        </p:nvSpPr>
+        <p:spPr>
+          <a:xfrm>
+            <a:off x="534759" y="3258028"/>
+            <a:ext cx="5439322" cy="920637"/>
+          </a:xfrm>
+          <a:prstGeom prst="rect">
+            <a:avLst/>
+          </a:prstGeom>
+        </p:spPr>
+        <p:txBody>
+          <a:bodyPr wrap="square" lIns="0" tIns="0" rIns="0" bIns="0" rtlCol="0" anchor="t">
+            <a:spAutoFit/>
+          </a:bodyPr>
+          <a:lstStyle/>
+          <a:p>
+            <a:pPr marL="0" lvl="0" indent="0" algn="l">
+              <a:lnSpc>
+                <a:spcPts val="8630"/>
+              </a:lnSpc>
+            </a:pPr>
+            <a:r>
+              <a:rPr lang="en-US" sz="3200" b="1" dirty="0">
+                <a:latin typeface="Noto Serif Bengali SemiCondensed Heavy"/>
+                <a:ea typeface="Noto Serif Bengali SemiCondensed Heavy"/>
+                <a:cs typeface="Noto Serif Bengali SemiCondensed Heavy"/>
+                <a:sym typeface="Noto Serif Bengali SemiCondensed Heavy"/>
+              </a:rPr>
+              <a:t>Business Recommendation</a:t>
+            </a:r>
+          </a:p>
+        </p:txBody>
+      </p:sp>
+      <p:sp>
+        <p:nvSpPr>
+          <p:cNvPr id="9" name="TextBox 14">
+            <a:extLst>
+              <a:ext uri="{FF2B5EF4-FFF2-40B4-BE49-F238E27FC236}">
+                <a16:creationId xmlns:a16="http://schemas.microsoft.com/office/drawing/2014/main" id="{062916E6-6E37-17BD-1454-CAAB35F87560}"/>
+              </a:ext>
+            </a:extLst>
+          </p:cNvPr>
+          <p:cNvSpPr txBox="1"/>
+          <p:nvPr/>
+        </p:nvSpPr>
+        <p:spPr>
+          <a:xfrm>
+            <a:off x="534759" y="4333897"/>
+            <a:ext cx="5561241" cy="984885"/>
+          </a:xfrm>
+          <a:prstGeom prst="rect">
+            <a:avLst/>
+          </a:prstGeom>
+        </p:spPr>
+        <p:txBody>
+          <a:bodyPr wrap="square" lIns="0" tIns="0" rIns="0" bIns="0" rtlCol="0" anchor="t">
+            <a:spAutoFit/>
+          </a:bodyPr>
+          <a:lstStyle/>
+          <a:p>
+            <a:pPr marL="342900" indent="-342900">
+              <a:buAutoNum type="arabicPeriod"/>
+            </a:pPr>
+            <a:r>
+              <a:rPr lang="en-US" sz="1600" dirty="0">
+                <a:latin typeface="Asap"/>
+                <a:ea typeface="Asap"/>
+                <a:cs typeface="Asap"/>
+                <a:sym typeface="Asap"/>
+              </a:rPr>
+              <a:t>Saran </a:t>
+            </a:r>
+            <a:r>
+              <a:rPr lang="en-US" sz="1600" dirty="0" err="1">
+                <a:latin typeface="Asap"/>
+                <a:ea typeface="Asap"/>
+                <a:cs typeface="Asap"/>
+                <a:sym typeface="Asap"/>
+              </a:rPr>
+              <a:t>dari</a:t>
+            </a:r>
+            <a:r>
+              <a:rPr lang="en-US" sz="1600" dirty="0">
+                <a:latin typeface="Asap"/>
+                <a:ea typeface="Asap"/>
+                <a:cs typeface="Asap"/>
+                <a:sym typeface="Asap"/>
+              </a:rPr>
+              <a:t> </a:t>
+            </a:r>
+            <a:r>
+              <a:rPr lang="en-US" sz="1600" dirty="0" err="1">
+                <a:latin typeface="Asap"/>
+                <a:ea typeface="Asap"/>
+                <a:cs typeface="Asap"/>
+                <a:sym typeface="Asap"/>
+              </a:rPr>
+              <a:t>saya</a:t>
+            </a:r>
+            <a:r>
+              <a:rPr lang="en-US" sz="1600" dirty="0">
+                <a:latin typeface="Asap"/>
+                <a:ea typeface="Asap"/>
+                <a:cs typeface="Asap"/>
+                <a:sym typeface="Asap"/>
+              </a:rPr>
+              <a:t> </a:t>
+            </a:r>
+            <a:r>
+              <a:rPr lang="en-US" sz="1600" dirty="0" err="1">
+                <a:latin typeface="Asap"/>
+                <a:ea typeface="Asap"/>
+                <a:cs typeface="Asap"/>
+                <a:sym typeface="Asap"/>
+              </a:rPr>
+              <a:t>sebaiknya</a:t>
+            </a:r>
+            <a:r>
+              <a:rPr lang="en-US" sz="1600" dirty="0">
+                <a:latin typeface="Asap"/>
+                <a:ea typeface="Asap"/>
+                <a:cs typeface="Asap"/>
+                <a:sym typeface="Asap"/>
+              </a:rPr>
+              <a:t> Perusahaan </a:t>
+            </a:r>
+            <a:r>
+              <a:rPr lang="en-US" sz="1600" dirty="0" err="1">
+                <a:latin typeface="Asap"/>
+                <a:ea typeface="Asap"/>
+                <a:cs typeface="Asap"/>
+                <a:sym typeface="Asap"/>
+              </a:rPr>
+              <a:t>harus</a:t>
+            </a:r>
+            <a:r>
+              <a:rPr lang="en-US" sz="1600" dirty="0">
+                <a:latin typeface="Asap"/>
+                <a:ea typeface="Asap"/>
+                <a:cs typeface="Asap"/>
+                <a:sym typeface="Asap"/>
+              </a:rPr>
+              <a:t> </a:t>
+            </a:r>
+            <a:r>
+              <a:rPr lang="en-US" sz="1600" dirty="0" err="1">
+                <a:latin typeface="Asap"/>
+                <a:ea typeface="Asap"/>
+                <a:cs typeface="Asap"/>
+                <a:sym typeface="Asap"/>
+              </a:rPr>
+              <a:t>lebih</a:t>
+            </a:r>
+            <a:r>
+              <a:rPr lang="en-US" sz="1600" dirty="0">
+                <a:latin typeface="Asap"/>
+                <a:ea typeface="Asap"/>
+                <a:cs typeface="Asap"/>
+                <a:sym typeface="Asap"/>
+              </a:rPr>
+              <a:t> </a:t>
+            </a:r>
+            <a:r>
+              <a:rPr lang="en-US" sz="1600" dirty="0" err="1">
+                <a:latin typeface="Asap"/>
+                <a:ea typeface="Asap"/>
+                <a:cs typeface="Asap"/>
+                <a:sym typeface="Asap"/>
+              </a:rPr>
+              <a:t>memonitoring</a:t>
+            </a:r>
+            <a:r>
+              <a:rPr lang="en-US" sz="1600" dirty="0">
+                <a:latin typeface="Asap"/>
+                <a:ea typeface="Asap"/>
+                <a:cs typeface="Asap"/>
+                <a:sym typeface="Asap"/>
+              </a:rPr>
+              <a:t> </a:t>
+            </a:r>
+            <a:r>
+              <a:rPr lang="en-US" sz="1600" dirty="0" err="1">
+                <a:latin typeface="Asap"/>
+                <a:ea typeface="Asap"/>
+                <a:cs typeface="Asap"/>
+                <a:sym typeface="Asap"/>
+              </a:rPr>
+              <a:t>skala</a:t>
+            </a:r>
+            <a:r>
+              <a:rPr lang="en-US" sz="1600" dirty="0">
+                <a:latin typeface="Asap"/>
+                <a:ea typeface="Asap"/>
+                <a:cs typeface="Asap"/>
+                <a:sym typeface="Asap"/>
+              </a:rPr>
+              <a:t> </a:t>
+            </a:r>
+            <a:r>
+              <a:rPr lang="en-US" sz="1600" dirty="0" err="1">
+                <a:latin typeface="Asap"/>
+                <a:ea typeface="Asap"/>
+                <a:cs typeface="Asap"/>
+                <a:sym typeface="Asap"/>
+              </a:rPr>
+              <a:t>besar</a:t>
+            </a:r>
+            <a:r>
+              <a:rPr lang="en-US" sz="1600" dirty="0">
+                <a:latin typeface="Asap"/>
+                <a:ea typeface="Asap"/>
+                <a:cs typeface="Asap"/>
+                <a:sym typeface="Asap"/>
+              </a:rPr>
+              <a:t> </a:t>
+            </a:r>
+            <a:r>
+              <a:rPr lang="en-US" sz="1600" dirty="0" err="1">
+                <a:latin typeface="Asap"/>
+                <a:ea typeface="Asap"/>
+                <a:cs typeface="Asap"/>
+                <a:sym typeface="Asap"/>
+              </a:rPr>
+              <a:t>baik</a:t>
+            </a:r>
+            <a:r>
+              <a:rPr lang="en-US" sz="1600" dirty="0">
+                <a:latin typeface="Asap"/>
+                <a:ea typeface="Asap"/>
+                <a:cs typeface="Asap"/>
+                <a:sym typeface="Asap"/>
+              </a:rPr>
+              <a:t> </a:t>
+            </a:r>
+            <a:r>
+              <a:rPr lang="en-US" sz="1600" dirty="0" err="1">
+                <a:latin typeface="Asap"/>
+                <a:ea typeface="Asap"/>
+                <a:cs typeface="Asap"/>
+                <a:sym typeface="Asap"/>
+              </a:rPr>
+              <a:t>nasabah</a:t>
+            </a:r>
+            <a:r>
+              <a:rPr lang="en-US" sz="1600" dirty="0">
+                <a:latin typeface="Asap"/>
+                <a:ea typeface="Asap"/>
+                <a:cs typeface="Asap"/>
+                <a:sym typeface="Asap"/>
+              </a:rPr>
+              <a:t> yang </a:t>
+            </a:r>
+            <a:r>
+              <a:rPr lang="en-US" sz="1600" dirty="0" err="1">
+                <a:latin typeface="Asap"/>
+                <a:ea typeface="Asap"/>
+                <a:cs typeface="Asap"/>
+                <a:sym typeface="Asap"/>
+              </a:rPr>
+              <a:t>mengambil</a:t>
+            </a:r>
+            <a:r>
+              <a:rPr lang="en-US" sz="1600" dirty="0">
+                <a:latin typeface="Asap"/>
+                <a:ea typeface="Asap"/>
+                <a:cs typeface="Asap"/>
+                <a:sym typeface="Asap"/>
+              </a:rPr>
+              <a:t> </a:t>
+            </a:r>
+            <a:r>
+              <a:rPr lang="en-US" sz="1600" dirty="0" err="1">
+                <a:latin typeface="Asap"/>
+                <a:ea typeface="Asap"/>
+                <a:cs typeface="Asap"/>
+                <a:sym typeface="Asap"/>
+              </a:rPr>
+              <a:t>pinjaman</a:t>
+            </a:r>
+            <a:r>
+              <a:rPr lang="en-US" sz="1600" dirty="0">
+                <a:latin typeface="Asap"/>
+                <a:ea typeface="Asap"/>
+                <a:cs typeface="Asap"/>
+                <a:sym typeface="Asap"/>
+              </a:rPr>
+              <a:t> 3X </a:t>
+            </a:r>
+            <a:r>
+              <a:rPr lang="en-US" sz="1600" dirty="0" err="1">
+                <a:latin typeface="Asap"/>
+                <a:ea typeface="Asap"/>
+                <a:cs typeface="Asap"/>
+                <a:sym typeface="Asap"/>
+              </a:rPr>
+              <a:t>atau</a:t>
+            </a:r>
+            <a:r>
+              <a:rPr lang="en-US" sz="1600" dirty="0">
+                <a:latin typeface="Asap"/>
+                <a:ea typeface="Asap"/>
+                <a:cs typeface="Asap"/>
+                <a:sym typeface="Asap"/>
+              </a:rPr>
+              <a:t> </a:t>
+            </a:r>
+            <a:r>
+              <a:rPr lang="en-US" sz="1600" dirty="0" err="1">
+                <a:latin typeface="Asap"/>
+                <a:ea typeface="Asap"/>
+                <a:cs typeface="Asap"/>
+                <a:sym typeface="Asap"/>
+              </a:rPr>
+              <a:t>lebih</a:t>
+            </a:r>
+            <a:r>
+              <a:rPr lang="en-US" sz="1600" dirty="0">
+                <a:latin typeface="Asap"/>
+                <a:ea typeface="Asap"/>
+                <a:cs typeface="Asap"/>
+                <a:sym typeface="Asap"/>
+              </a:rPr>
+              <a:t> </a:t>
+            </a:r>
+            <a:r>
+              <a:rPr lang="en-US" sz="1600" dirty="0" err="1">
+                <a:latin typeface="Asap"/>
+                <a:ea typeface="Asap"/>
+                <a:cs typeface="Asap"/>
+                <a:sym typeface="Asap"/>
+              </a:rPr>
+              <a:t>besar</a:t>
+            </a:r>
+            <a:r>
+              <a:rPr lang="en-US" sz="1600" dirty="0">
+                <a:latin typeface="Asap"/>
+                <a:ea typeface="Asap"/>
+                <a:cs typeface="Asap"/>
+                <a:sym typeface="Asap"/>
+              </a:rPr>
+              <a:t> </a:t>
+            </a:r>
+            <a:r>
+              <a:rPr lang="en-US" sz="1600" dirty="0" err="1">
+                <a:latin typeface="Asap"/>
+                <a:ea typeface="Asap"/>
+                <a:cs typeface="Asap"/>
+                <a:sym typeface="Asap"/>
+              </a:rPr>
+              <a:t>dari</a:t>
+            </a:r>
+            <a:r>
+              <a:rPr lang="en-US" sz="1600" dirty="0">
+                <a:latin typeface="Asap"/>
+                <a:ea typeface="Asap"/>
+                <a:cs typeface="Asap"/>
+                <a:sym typeface="Asap"/>
+              </a:rPr>
+              <a:t> </a:t>
+            </a:r>
+            <a:r>
+              <a:rPr lang="en-US" sz="1600" dirty="0" err="1">
+                <a:latin typeface="Asap"/>
+                <a:ea typeface="Asap"/>
+                <a:cs typeface="Asap"/>
+                <a:sym typeface="Asap"/>
+              </a:rPr>
+              <a:t>pendapatan</a:t>
+            </a:r>
+            <a:r>
+              <a:rPr lang="en-US" sz="1600" dirty="0">
+                <a:latin typeface="Asap"/>
+                <a:ea typeface="Asap"/>
+                <a:cs typeface="Asap"/>
+                <a:sym typeface="Asap"/>
+              </a:rPr>
+              <a:t> </a:t>
+            </a:r>
+            <a:r>
+              <a:rPr lang="en-US" sz="1600" dirty="0" err="1">
+                <a:latin typeface="Asap"/>
+                <a:ea typeface="Asap"/>
+                <a:cs typeface="Asap"/>
+                <a:sym typeface="Asap"/>
+              </a:rPr>
+              <a:t>mereka</a:t>
+            </a:r>
+            <a:r>
+              <a:rPr lang="en-US" sz="1600" dirty="0">
+                <a:latin typeface="Asap"/>
+                <a:ea typeface="Asap"/>
+                <a:cs typeface="Asap"/>
+                <a:sym typeface="Asap"/>
+              </a:rPr>
+              <a:t>.</a:t>
+            </a:r>
+            <a:endParaRPr lang="en-ID" sz="1600" dirty="0"/>
+          </a:p>
+          <a:p>
+            <a:pPr marL="0" lvl="0" indent="0" algn="l"/>
+            <a:endParaRPr lang="en-US" sz="1600" dirty="0">
+              <a:latin typeface="Asap"/>
+              <a:ea typeface="Asap"/>
+              <a:cs typeface="Asap"/>
+              <a:sym typeface="Asap"/>
+            </a:endParaRPr>
+          </a:p>
+        </p:txBody>
+      </p:sp>
+      <p:pic>
+        <p:nvPicPr>
+          <p:cNvPr id="5" name="Picture 4">
+            <a:extLst>
+              <a:ext uri="{FF2B5EF4-FFF2-40B4-BE49-F238E27FC236}">
+                <a16:creationId xmlns:a16="http://schemas.microsoft.com/office/drawing/2014/main" id="{1516E365-E31F-41EB-A8E7-BD75608E5ABE}"/>
+              </a:ext>
+            </a:extLst>
+          </p:cNvPr>
+          <p:cNvPicPr>
+            <a:picLocks noChangeAspect="1"/>
+          </p:cNvPicPr>
+          <p:nvPr/>
+        </p:nvPicPr>
+        <p:blipFill>
+          <a:blip r:embed="rId3">
+            <a:extLst>
+              <a:ext uri="{28A0092B-C50C-407E-A947-70E740481C1C}">
+                <a14:useLocalDpi xmlns:a14="http://schemas.microsoft.com/office/drawing/2010/main" val="0"/>
+              </a:ext>
+            </a:extLst>
+          </a:blip>
+          <a:stretch>
+            <a:fillRect/>
+          </a:stretch>
+        </p:blipFill>
+        <p:spPr>
+          <a:xfrm>
+            <a:off x="6339714" y="1589932"/>
+            <a:ext cx="5683161" cy="3678136"/>
+          </a:xfrm>
+          <a:prstGeom prst="rect">
+            <a:avLst/>
+          </a:prstGeom>
+        </p:spPr>
+      </p:pic>
+    </p:spTree>
+    <p:extLst>
+      <p:ext uri="{BB962C8B-B14F-4D97-AF65-F5344CB8AC3E}">
+        <p14:creationId xmlns:p14="http://schemas.microsoft.com/office/powerpoint/2010/main" val="241840150"/>
+      </p:ext>
+    </p:extLst>
+  </p:cSld>
+  <p:clrMapOvr>
+    <a:masterClrMapping/>
+  </p:clrMapOvr>
+</p:sld>
+</file>
+
+<file path=ppt/slides/slide9.xml><?xml version="1.0" encoding="utf-8"?>
 <p:sld xmlns:a="http://schemas.openxmlformats.org/drawingml/2006/main" xmlns:r="http://schemas.openxmlformats.org/officeDocument/2006/relationships" xmlns:p="http://schemas.openxmlformats.org/presentationml/2006/main">
   <p:cSld>
     <p:spTree>
@@ -10518,7 +15098,20 @@
               <a:rPr lang="en-US" sz="2000" dirty="0">
                 <a:latin typeface="Asap"/>
               </a:rPr>
-              <a:t>Link GitHub: https://github.com/clexanp/Final-Project-Home-Credit-Scoring-Project.git</a:t>
+              <a:t>Link GitHub: </a:t>
+            </a:r>
+            <a:r>
+              <a:rPr lang="en-US" sz="2000" dirty="0">
+                <a:latin typeface="Asap"/>
+                <a:hlinkClick r:id="rId4"/>
+              </a:rPr>
+              <a:t>https://github.com/clexanp/Home-Credit-Scorecard-Model.git</a:t>
+            </a:r>
+            <a:r>
+              <a:rPr lang="en-US" sz="2000" dirty="0">
+                <a:latin typeface="Asap"/>
+              </a:rPr>
+              <a:t> </a:t>
             </a:r>
             <a:endParaRPr lang="en-ID" sz="2000" dirty="0">
               <a:latin typeface="Asap"/>
